--- a/docs/SmartShop_Project_Presentation.pptx
+++ b/docs/SmartShop_Project_Presentation.pptx
@@ -3153,7 +3153,7 @@
         </p:nvSpPr>
         <p:spPr>
           <a:xfrm>
-            <a:off x="914400" y="1371600"/>
+            <a:off x="914400" y="1280160"/>
             <a:ext cx="10362895" cy="2743200"/>
           </a:xfrm>
           <a:prstGeom prst="rect">
@@ -3168,7 +3168,7 @@
           <a:lstStyle/>
           <a:p>
             <a:pPr>
-              <a:defRPr sz="1400" b="1">
+              <a:defRPr sz="1300" b="1">
                 <a:solidFill>
                   <a:srgbClr val="0284C7"/>
                 </a:solidFill>
@@ -3176,7 +3176,7 @@
               </a:defRPr>
             </a:pPr>
             <a:r>
-              <a:t>MAJOR PROJECT PRESENTATION</a:t>
+              <a:t>MCA 3RD SEMESTER MINI PROJECT PRESENTATION</a:t>
             </a:r>
           </a:p>
           <a:p>
@@ -3197,7 +3197,7 @@
               <a:spcBef>
                 <a:spcPts val="800"/>
               </a:spcBef>
-              <a:defRPr sz="1800">
+              <a:defRPr sz="1700">
                 <a:solidFill>
                   <a:srgbClr val="94A3B8"/>
                 </a:solidFill>
@@ -3205,7 +3205,7 @@
               </a:defRPr>
             </a:pPr>
             <a:r>
-              <a:t>A Modern Digital Shop Management, POS &amp; Customer Khata Ledger Platform</a:t>
+              <a:t>A Fullstack Digital Shop Management, POS Billing &amp; Customer Khata Ledger Platform</a:t>
             </a:r>
           </a:p>
         </p:txBody>
@@ -3278,7 +3278,7 @@
           <a:lstStyle/>
           <a:p>
             <a:pPr>
-              <a:defRPr sz="1400" b="1">
+              <a:defRPr sz="1300" b="1">
                 <a:solidFill>
                   <a:srgbClr val="FFFFFF"/>
                 </a:solidFill>
@@ -3286,23 +3286,7 @@
               </a:defRPr>
             </a:pPr>
             <a:r>
-              <a:t>Submitted By:  Ajit Singh &amp; Team            |      Branch: Computer Science &amp; Engineering</a:t>
-            </a:r>
-          </a:p>
-          <a:p>
-            <a:pPr>
-              <a:spcBef>
-                <a:spcPts val="800"/>
-              </a:spcBef>
-              <a:defRPr sz="1300">
-                <a:solidFill>
-                  <a:srgbClr val="CBD5E1"/>
-                </a:solidFill>
-                <a:latin typeface="Arial"/>
-              </a:defRPr>
-            </a:pPr>
-            <a:r>
-              <a:t>Project Guide:  Faculty Guide / Project Coordinator</a:t>
+              <a:t>Submitted By:  Ajit Kumar (Roll No: 2504280140008)     |      Course: Master of Computer Applications (MCA 3rd Sem)</a:t>
             </a:r>
           </a:p>
           <a:p>
@@ -3310,6 +3294,22 @@
               <a:spcBef>
                 <a:spcPts val="600"/>
               </a:spcBef>
+              <a:defRPr sz="1250">
+                <a:solidFill>
+                  <a:srgbClr val="CBD5E1"/>
+                </a:solidFill>
+                <a:latin typeface="Arial"/>
+              </a:defRPr>
+            </a:pPr>
+            <a:r>
+              <a:t>Guided By:  Faculty Project Guide / Project Coordinator</a:t>
+            </a:r>
+          </a:p>
+          <a:p>
+            <a:pPr>
+              <a:spcBef>
+                <a:spcPts val="500"/>
+              </a:spcBef>
               <a:defRPr sz="1200">
                 <a:solidFill>
                   <a:srgbClr val="0284C7"/>
@@ -3318,7 +3318,7 @@
               </a:defRPr>
             </a:pPr>
             <a:r>
-              <a:t>Academic Session: 2025 – 2026                 |      Tech Stack: MERN Stack (MongoDB, Express, React 19, Node.js)</a:t>
+              <a:t>Academic Session: 2026 – 2027                 |      Tech Stack: MERN Stack (MongoDB, Express, React 19, Node.js)</a:t>
             </a:r>
           </a:p>
         </p:txBody>
@@ -3364,7 +3364,7 @@
           <a:lstStyle/>
           <a:p>
             <a:pPr>
-              <a:defRPr sz="1100" b="1">
+              <a:defRPr sz="1050" b="1">
                 <a:solidFill>
                   <a:srgbClr val="0284C7"/>
                 </a:solidFill>
@@ -3372,12 +3372,12 @@
               </a:defRPr>
             </a:pPr>
             <a:r>
-              <a:t>MAJOR PROJECT PRESENTATION</a:t>
-            </a:r>
-          </a:p>
-          <a:p>
-            <a:pPr>
-              <a:defRPr sz="2400" b="1">
+              <a:t>MCA 3RD SEMESTER MINI PROJECT PRESENTATION</a:t>
+            </a:r>
+          </a:p>
+          <a:p>
+            <a:pPr>
+              <a:defRPr sz="2300" b="1">
                 <a:solidFill>
                   <a:srgbClr val="1E3A8A"/>
                 </a:solidFill>
@@ -3385,7 +3385,7 @@
               </a:defRPr>
             </a:pPr>
             <a:r>
-              <a:t>Core Module: Payment Processing &amp; Verification</a:t>
+              <a:t>Core Module: Payments &amp; Claims Verification</a:t>
             </a:r>
           </a:p>
         </p:txBody>
@@ -3504,9 +3504,9 @@
           <a:p>
             <a:pPr>
               <a:spcAft>
-                <a:spcPts val="1000"/>
-              </a:spcAft>
-              <a:defRPr sz="1500" b="1">
+                <a:spcPts val="800"/>
+              </a:spcAft>
+              <a:defRPr sz="1450" b="1">
                 <a:solidFill>
                   <a:srgbClr val="1E3A8A"/>
                 </a:solidFill>
@@ -3514,71 +3514,71 @@
               </a:defRPr>
             </a:pPr>
             <a:r>
-              <a:t>Customer Payment Channels</a:t>
-            </a:r>
-          </a:p>
-          <a:p>
-            <a:pPr>
-              <a:spcAft>
-                <a:spcPts val="600"/>
-              </a:spcAft>
-              <a:defRPr sz="1200">
-                <a:solidFill>
-                  <a:srgbClr val="0F172A"/>
-                </a:solidFill>
-                <a:latin typeface="Arial"/>
-              </a:defRPr>
-            </a:pPr>
-            <a:r>
-              <a:t>•  Cash Claim Submission: Customer submits a claim specifying the store clerk who received physical cash.</a:t>
-            </a:r>
-          </a:p>
-          <a:p>
-            <a:pPr>
-              <a:spcAft>
-                <a:spcPts val="600"/>
-              </a:spcAft>
-              <a:defRPr sz="1200">
-                <a:solidFill>
-                  <a:srgbClr val="0F172A"/>
-                </a:solidFill>
-                <a:latin typeface="Arial"/>
-              </a:defRPr>
-            </a:pPr>
-            <a:r>
-              <a:t>•  UPI Proof Upload: Customer enters UPI / UTR Transaction ID and uploads payment screenshot.</a:t>
-            </a:r>
-          </a:p>
-          <a:p>
-            <a:pPr>
-              <a:spcAft>
-                <a:spcPts val="600"/>
-              </a:spcAft>
-              <a:defRPr sz="1200">
-                <a:solidFill>
-                  <a:srgbClr val="0F172A"/>
-                </a:solidFill>
-                <a:latin typeface="Arial"/>
-              </a:defRPr>
-            </a:pPr>
-            <a:r>
-              <a:t>•  Razorpay Gateway: Instant automated settlement via UPI, Debit/Credit Card, or Netbanking.</a:t>
-            </a:r>
-          </a:p>
-          <a:p>
-            <a:pPr>
-              <a:spcAft>
-                <a:spcPts val="600"/>
-              </a:spcAft>
-              <a:defRPr sz="1200">
-                <a:solidFill>
-                  <a:srgbClr val="0F172A"/>
-                </a:solidFill>
-                <a:latin typeface="Arial"/>
-              </a:defRPr>
-            </a:pPr>
-            <a:r>
-              <a:t>•  Real-Time Statuses: Payments display 'Pending Verification', 'Approved', or 'Rejected'.</a:t>
+              <a:t>Customer Payment Options</a:t>
+            </a:r>
+          </a:p>
+          <a:p>
+            <a:pPr>
+              <a:spcAft>
+                <a:spcPts val="500"/>
+              </a:spcAft>
+              <a:defRPr sz="1150">
+                <a:solidFill>
+                  <a:srgbClr val="0F172A"/>
+                </a:solidFill>
+                <a:latin typeface="Arial"/>
+              </a:defRPr>
+            </a:pPr>
+            <a:r>
+              <a:t>•  Cash Payment Claim: Customer submits a claim specifying the store clerk who received physical cash.</a:t>
+            </a:r>
+          </a:p>
+          <a:p>
+            <a:pPr>
+              <a:spcAft>
+                <a:spcPts val="500"/>
+              </a:spcAft>
+              <a:defRPr sz="1150">
+                <a:solidFill>
+                  <a:srgbClr val="0F172A"/>
+                </a:solidFill>
+                <a:latin typeface="Arial"/>
+              </a:defRPr>
+            </a:pPr>
+            <a:r>
+              <a:t>•  UPI Proof Upload: Customer enters UPI UTR Transaction ID and uploads payment screenshot.</a:t>
+            </a:r>
+          </a:p>
+          <a:p>
+            <a:pPr>
+              <a:spcAft>
+                <a:spcPts val="500"/>
+              </a:spcAft>
+              <a:defRPr sz="1150">
+                <a:solidFill>
+                  <a:srgbClr val="0F172A"/>
+                </a:solidFill>
+                <a:latin typeface="Arial"/>
+              </a:defRPr>
+            </a:pPr>
+            <a:r>
+              <a:t>•  Razorpay Gateway: Instant online clearance via UPI, Debit/Credit Card, or Netbanking.</a:t>
+            </a:r>
+          </a:p>
+          <a:p>
+            <a:pPr>
+              <a:spcAft>
+                <a:spcPts val="500"/>
+              </a:spcAft>
+              <a:defRPr sz="1150">
+                <a:solidFill>
+                  <a:srgbClr val="0F172A"/>
+                </a:solidFill>
+                <a:latin typeface="Arial"/>
+              </a:defRPr>
+            </a:pPr>
+            <a:r>
+              <a:t>•  Real-Time Statuses: Displays 'Pending Verification', 'Approved', or 'Rejected'.</a:t>
             </a:r>
           </a:p>
         </p:txBody>
@@ -3652,9 +3652,9 @@
           <a:p>
             <a:pPr>
               <a:spcAft>
-                <a:spcPts val="1000"/>
-              </a:spcAft>
-              <a:defRPr sz="1500" b="1">
+                <a:spcPts val="800"/>
+              </a:spcAft>
+              <a:defRPr sz="1450" b="1">
                 <a:solidFill>
                   <a:srgbClr val="1E3A8A"/>
                 </a:solidFill>
@@ -3668,41 +3668,41 @@
           <a:p>
             <a:pPr>
               <a:spcAft>
-                <a:spcPts val="600"/>
-              </a:spcAft>
-              <a:defRPr sz="1200">
-                <a:solidFill>
-                  <a:srgbClr val="0F172A"/>
-                </a:solidFill>
-                <a:latin typeface="Arial"/>
-              </a:defRPr>
-            </a:pPr>
-            <a:r>
-              <a:t>•  Dedicated Verification Queue: Lists all pending customer claims awaiting admin approval.</a:t>
-            </a:r>
-          </a:p>
-          <a:p>
-            <a:pPr>
-              <a:spcAft>
-                <a:spcPts val="600"/>
-              </a:spcAft>
-              <a:defRPr sz="1200">
-                <a:solidFill>
-                  <a:srgbClr val="0F172A"/>
-                </a:solidFill>
-                <a:latin typeface="Arial"/>
-              </a:defRPr>
-            </a:pPr>
-            <a:r>
-              <a:t>•  Receipt Preview: Admins inspect uploaded proof images stored on Cloudinary CDN.</a:t>
-            </a:r>
-          </a:p>
-          <a:p>
-            <a:pPr>
-              <a:spcAft>
-                <a:spcPts val="600"/>
-              </a:spcAft>
-              <a:defRPr sz="1200">
+                <a:spcPts val="500"/>
+              </a:spcAft>
+              <a:defRPr sz="1150">
+                <a:solidFill>
+                  <a:srgbClr val="0F172A"/>
+                </a:solidFill>
+                <a:latin typeface="Arial"/>
+              </a:defRPr>
+            </a:pPr>
+            <a:r>
+              <a:t>•  Verification Queue: Lists all pending customer claims awaiting admin review.</a:t>
+            </a:r>
+          </a:p>
+          <a:p>
+            <a:pPr>
+              <a:spcAft>
+                <a:spcPts val="500"/>
+              </a:spcAft>
+              <a:defRPr sz="1150">
+                <a:solidFill>
+                  <a:srgbClr val="0F172A"/>
+                </a:solidFill>
+                <a:latin typeface="Arial"/>
+              </a:defRPr>
+            </a:pPr>
+            <a:r>
+              <a:t>•  Screenshot Preview: Admins inspect uploaded receipt images stored on Cloudinary.</a:t>
+            </a:r>
+          </a:p>
+          <a:p>
+            <a:pPr>
+              <a:spcAft>
+                <a:spcPts val="500"/>
+              </a:spcAft>
+              <a:defRPr sz="1150">
                 <a:solidFill>
                   <a:srgbClr val="0F172A"/>
                 </a:solidFill>
@@ -3716,17 +3716,17 @@
           <a:p>
             <a:pPr>
               <a:spcAft>
-                <a:spcPts val="600"/>
-              </a:spcAft>
-              <a:defRPr sz="1200">
-                <a:solidFill>
-                  <a:srgbClr val="0F172A"/>
-                </a:solidFill>
-                <a:latin typeface="Arial"/>
-              </a:defRPr>
-            </a:pPr>
-            <a:r>
-              <a:t>•  Audit Trail: Saves timestamps, verifying admin name, and remarks for total clarity.</a:t>
+                <a:spcPts val="500"/>
+              </a:spcAft>
+              <a:defRPr sz="1150">
+                <a:solidFill>
+                  <a:srgbClr val="0F172A"/>
+                </a:solidFill>
+                <a:latin typeface="Arial"/>
+              </a:defRPr>
+            </a:pPr>
+            <a:r>
+              <a:t>•  Audit Trail: Saves timestamps, verifying admin details, and remarks.</a:t>
             </a:r>
           </a:p>
         </p:txBody>
@@ -3772,7 +3772,7 @@
           <a:lstStyle/>
           <a:p>
             <a:pPr>
-              <a:defRPr sz="1100" b="1">
+              <a:defRPr sz="1050" b="1">
                 <a:solidFill>
                   <a:srgbClr val="0284C7"/>
                 </a:solidFill>
@@ -3780,12 +3780,12 @@
               </a:defRPr>
             </a:pPr>
             <a:r>
-              <a:t>MAJOR PROJECT PRESENTATION</a:t>
-            </a:r>
-          </a:p>
-          <a:p>
-            <a:pPr>
-              <a:defRPr sz="2400" b="1">
+              <a:t>MCA 3RD SEMESTER MINI PROJECT PRESENTATION</a:t>
+            </a:r>
+          </a:p>
+          <a:p>
+            <a:pPr>
+              <a:defRPr sz="2300" b="1">
                 <a:solidFill>
                   <a:srgbClr val="1E3A8A"/>
                 </a:solidFill>
@@ -3793,7 +3793,7 @@
               </a:defRPr>
             </a:pPr>
             <a:r>
-              <a:t>Database Schema &amp; Entity Relationships</a:t>
+              <a:t>Database Design (7 Core Collections)</a:t>
             </a:r>
           </a:p>
         </p:txBody>
@@ -3912,9 +3912,9 @@
           <a:p>
             <a:pPr>
               <a:spcAft>
-                <a:spcPts val="1000"/>
-              </a:spcAft>
-              <a:defRPr sz="1500" b="1">
+                <a:spcPts val="800"/>
+              </a:spcAft>
+              <a:defRPr sz="1450" b="1">
                 <a:solidFill>
                   <a:srgbClr val="1E3A8A"/>
                 </a:solidFill>
@@ -3922,31 +3922,31 @@
               </a:defRPr>
             </a:pPr>
             <a:r>
-              <a:t>User &amp; Customer Entities</a:t>
-            </a:r>
-          </a:p>
-          <a:p>
-            <a:pPr>
-              <a:spcAft>
-                <a:spcPts val="600"/>
-              </a:spcAft>
-              <a:defRPr sz="1200">
-                <a:solidFill>
-                  <a:srgbClr val="0F172A"/>
-                </a:solidFill>
-                <a:latin typeface="Arial"/>
-              </a:defRPr>
-            </a:pPr>
-            <a:r>
-              <a:t>•  User Collection:</a:t>
-            </a:r>
-          </a:p>
-          <a:p>
-            <a:pPr>
-              <a:spcAft>
-                <a:spcPts val="600"/>
-              </a:spcAft>
-              <a:defRPr sz="1200">
+              <a:t>User &amp; Customer Collections</a:t>
+            </a:r>
+          </a:p>
+          <a:p>
+            <a:pPr>
+              <a:spcAft>
+                <a:spcPts val="500"/>
+              </a:spcAft>
+              <a:defRPr sz="1150">
+                <a:solidFill>
+                  <a:srgbClr val="0F172A"/>
+                </a:solidFill>
+                <a:latin typeface="Arial"/>
+              </a:defRPr>
+            </a:pPr>
+            <a:r>
+              <a:t>•  D1: Users Collection</a:t>
+            </a:r>
+          </a:p>
+          <a:p>
+            <a:pPr>
+              <a:spcAft>
+                <a:spcPts val="500"/>
+              </a:spcAft>
+              <a:defRPr sz="1150">
                 <a:solidFill>
                   <a:srgbClr val="0F172A"/>
                 </a:solidFill>
@@ -3960,9 +3960,9 @@
           <a:p>
             <a:pPr>
               <a:spcAft>
-                <a:spcPts val="600"/>
-              </a:spcAft>
-              <a:defRPr sz="1200">
+                <a:spcPts val="500"/>
+              </a:spcAft>
+              <a:defRPr sz="1150">
                 <a:solidFill>
                   <a:srgbClr val="0F172A"/>
                 </a:solidFill>
@@ -3976,25 +3976,25 @@
           <a:p>
             <a:pPr>
               <a:spcAft>
-                <a:spcPts val="600"/>
-              </a:spcAft>
-              <a:defRPr sz="1200">
-                <a:solidFill>
-                  <a:srgbClr val="0F172A"/>
-                </a:solidFill>
-                <a:latin typeface="Arial"/>
-              </a:defRPr>
-            </a:pPr>
-            <a:r>
-              <a:t>  • role: 'customer' | 'admin' | 'superadmin'</a:t>
-            </a:r>
-          </a:p>
-          <a:p>
-            <a:pPr>
-              <a:spcAft>
-                <a:spcPts val="600"/>
-              </a:spcAft>
-              <a:defRPr sz="1200">
+                <a:spcPts val="500"/>
+              </a:spcAft>
+              <a:defRPr sz="1150">
+                <a:solidFill>
+                  <a:srgbClr val="0F172A"/>
+                </a:solidFill>
+                <a:latin typeface="Arial"/>
+              </a:defRPr>
+            </a:pPr>
+            <a:r>
+              <a:t>  • role: 'customer'|'admin'</a:t>
+            </a:r>
+          </a:p>
+          <a:p>
+            <a:pPr>
+              <a:spcAft>
+                <a:spcPts val="500"/>
+              </a:spcAft>
+              <a:defRPr sz="1150">
                 <a:solidFill>
                   <a:srgbClr val="0F172A"/>
                 </a:solidFill>
@@ -4008,25 +4008,25 @@
           <a:p>
             <a:pPr>
               <a:spcAft>
-                <a:spcPts val="600"/>
-              </a:spcAft>
-              <a:defRPr sz="1200">
-                <a:solidFill>
-                  <a:srgbClr val="0F172A"/>
-                </a:solidFill>
-                <a:latin typeface="Arial"/>
-              </a:defRPr>
-            </a:pPr>
-            <a:r>
-              <a:t>•  Customer Collection:</a:t>
-            </a:r>
-          </a:p>
-          <a:p>
-            <a:pPr>
-              <a:spcAft>
-                <a:spcPts val="600"/>
-              </a:spcAft>
-              <a:defRPr sz="1200">
+                <a:spcPts val="500"/>
+              </a:spcAft>
+              <a:defRPr sz="1150">
+                <a:solidFill>
+                  <a:srgbClr val="0F172A"/>
+                </a:solidFill>
+                <a:latin typeface="Arial"/>
+              </a:defRPr>
+            </a:pPr>
+            <a:r>
+              <a:t>•  D2: Customers Collection</a:t>
+            </a:r>
+          </a:p>
+          <a:p>
+            <a:pPr>
+              <a:spcAft>
+                <a:spcPts val="500"/>
+              </a:spcAft>
+              <a:defRPr sz="1150">
                 <a:solidFill>
                   <a:srgbClr val="0F172A"/>
                 </a:solidFill>
@@ -4040,9 +4040,9 @@
           <a:p>
             <a:pPr>
               <a:spcAft>
-                <a:spcPts val="600"/>
-              </a:spcAft>
-              <a:defRPr sz="1200">
+                <a:spcPts val="500"/>
+              </a:spcAft>
+              <a:defRPr sz="1150">
                 <a:solidFill>
                   <a:srgbClr val="0F172A"/>
                 </a:solidFill>
@@ -4056,9 +4056,9 @@
           <a:p>
             <a:pPr>
               <a:spcAft>
-                <a:spcPts val="600"/>
-              </a:spcAft>
-              <a:defRPr sz="1200">
+                <a:spcPts val="500"/>
+              </a:spcAft>
+              <a:defRPr sz="1150">
                 <a:solidFill>
                   <a:srgbClr val="0F172A"/>
                 </a:solidFill>
@@ -4140,9 +4140,9 @@
           <a:p>
             <a:pPr>
               <a:spcAft>
-                <a:spcPts val="1000"/>
-              </a:spcAft>
-              <a:defRPr sz="1500" b="1">
+                <a:spcPts val="800"/>
+              </a:spcAft>
+              <a:defRPr sz="1450" b="1">
                 <a:solidFill>
                   <a:srgbClr val="1E3A8A"/>
                 </a:solidFill>
@@ -4150,31 +4150,31 @@
               </a:defRPr>
             </a:pPr>
             <a:r>
-              <a:t>Catalog &amp; Sales Entities</a:t>
-            </a:r>
-          </a:p>
-          <a:p>
-            <a:pPr>
-              <a:spcAft>
-                <a:spcPts val="600"/>
-              </a:spcAft>
-              <a:defRPr sz="1200">
-                <a:solidFill>
-                  <a:srgbClr val="0F172A"/>
-                </a:solidFill>
-                <a:latin typeface="Arial"/>
-              </a:defRPr>
-            </a:pPr>
-            <a:r>
-              <a:t>•  Product Collection:</a:t>
-            </a:r>
-          </a:p>
-          <a:p>
-            <a:pPr>
-              <a:spcAft>
-                <a:spcPts val="600"/>
-              </a:spcAft>
-              <a:defRPr sz="1200">
+              <a:t>Product &amp; Sales Collections</a:t>
+            </a:r>
+          </a:p>
+          <a:p>
+            <a:pPr>
+              <a:spcAft>
+                <a:spcPts val="500"/>
+              </a:spcAft>
+              <a:defRPr sz="1150">
+                <a:solidFill>
+                  <a:srgbClr val="0F172A"/>
+                </a:solidFill>
+                <a:latin typeface="Arial"/>
+              </a:defRPr>
+            </a:pPr>
+            <a:r>
+              <a:t>•  D3: Products Collection</a:t>
+            </a:r>
+          </a:p>
+          <a:p>
+            <a:pPr>
+              <a:spcAft>
+                <a:spcPts val="500"/>
+              </a:spcAft>
+              <a:defRPr sz="1150">
                 <a:solidFill>
                   <a:srgbClr val="0F172A"/>
                 </a:solidFill>
@@ -4188,9 +4188,9 @@
           <a:p>
             <a:pPr>
               <a:spcAft>
-                <a:spcPts val="600"/>
-              </a:spcAft>
-              <a:defRPr sz="1200">
+                <a:spcPts val="500"/>
+              </a:spcAft>
+              <a:defRPr sz="1150">
                 <a:solidFill>
                   <a:srgbClr val="0F172A"/>
                 </a:solidFill>
@@ -4204,9 +4204,9 @@
           <a:p>
             <a:pPr>
               <a:spcAft>
-                <a:spcPts val="600"/>
-              </a:spcAft>
-              <a:defRPr sz="1200">
+                <a:spcPts val="500"/>
+              </a:spcAft>
+              <a:defRPr sz="1150">
                 <a:solidFill>
                   <a:srgbClr val="0F172A"/>
                 </a:solidFill>
@@ -4220,25 +4220,25 @@
           <a:p>
             <a:pPr>
               <a:spcAft>
-                <a:spcPts val="600"/>
-              </a:spcAft>
-              <a:defRPr sz="1200">
-                <a:solidFill>
-                  <a:srgbClr val="0F172A"/>
-                </a:solidFill>
-                <a:latin typeface="Arial"/>
-              </a:defRPr>
-            </a:pPr>
-            <a:r>
-              <a:t>•  Sale Collection:</a:t>
-            </a:r>
-          </a:p>
-          <a:p>
-            <a:pPr>
-              <a:spcAft>
-                <a:spcPts val="600"/>
-              </a:spcAft>
-              <a:defRPr sz="1200">
+                <a:spcPts val="500"/>
+              </a:spcAft>
+              <a:defRPr sz="1150">
+                <a:solidFill>
+                  <a:srgbClr val="0F172A"/>
+                </a:solidFill>
+                <a:latin typeface="Arial"/>
+              </a:defRPr>
+            </a:pPr>
+            <a:r>
+              <a:t>•  D4: Sales Collection</a:t>
+            </a:r>
+          </a:p>
+          <a:p>
+            <a:pPr>
+              <a:spcAft>
+                <a:spcPts val="500"/>
+              </a:spcAft>
+              <a:defRPr sz="1150">
                 <a:solidFill>
                   <a:srgbClr val="0F172A"/>
                 </a:solidFill>
@@ -4252,9 +4252,9 @@
           <a:p>
             <a:pPr>
               <a:spcAft>
-                <a:spcPts val="600"/>
-              </a:spcAft>
-              <a:defRPr sz="1200">
+                <a:spcPts val="500"/>
+              </a:spcAft>
+              <a:defRPr sz="1150">
                 <a:solidFill>
                   <a:srgbClr val="0F172A"/>
                 </a:solidFill>
@@ -4268,9 +4268,9 @@
           <a:p>
             <a:pPr>
               <a:spcAft>
-                <a:spcPts val="600"/>
-              </a:spcAft>
-              <a:defRPr sz="1200">
+                <a:spcPts val="500"/>
+              </a:spcAft>
+              <a:defRPr sz="1150">
                 <a:solidFill>
                   <a:srgbClr val="0F172A"/>
                 </a:solidFill>
@@ -4284,9 +4284,9 @@
           <a:p>
             <a:pPr>
               <a:spcAft>
-                <a:spcPts val="600"/>
-              </a:spcAft>
-              <a:defRPr sz="1200">
+                <a:spcPts val="500"/>
+              </a:spcAft>
+              <a:defRPr sz="1150">
                 <a:solidFill>
                   <a:srgbClr val="0F172A"/>
                 </a:solidFill>
@@ -4368,9 +4368,9 @@
           <a:p>
             <a:pPr>
               <a:spcAft>
-                <a:spcPts val="1000"/>
-              </a:spcAft>
-              <a:defRPr sz="1500" b="1">
+                <a:spcPts val="800"/>
+              </a:spcAft>
+              <a:defRPr sz="1450" b="1">
                 <a:solidFill>
                   <a:srgbClr val="1E3A8A"/>
                 </a:solidFill>
@@ -4378,31 +4378,31 @@
               </a:defRPr>
             </a:pPr>
             <a:r>
-              <a:t>Ledger &amp; Returns Entities</a:t>
-            </a:r>
-          </a:p>
-          <a:p>
-            <a:pPr>
-              <a:spcAft>
-                <a:spcPts val="600"/>
-              </a:spcAft>
-              <a:defRPr sz="1200">
-                <a:solidFill>
-                  <a:srgbClr val="0F172A"/>
-                </a:solidFill>
-                <a:latin typeface="Arial"/>
-              </a:defRPr>
-            </a:pPr>
-            <a:r>
-              <a:t>•  Credit Collection:</a:t>
-            </a:r>
-          </a:p>
-          <a:p>
-            <a:pPr>
-              <a:spcAft>
-                <a:spcPts val="600"/>
-              </a:spcAft>
-              <a:defRPr sz="1200">
+              <a:t>Khata, Payment &amp; Returns</a:t>
+            </a:r>
+          </a:p>
+          <a:p>
+            <a:pPr>
+              <a:spcAft>
+                <a:spcPts val="500"/>
+              </a:spcAft>
+              <a:defRPr sz="1150">
+                <a:solidFill>
+                  <a:srgbClr val="0F172A"/>
+                </a:solidFill>
+                <a:latin typeface="Arial"/>
+              </a:defRPr>
+            </a:pPr>
+            <a:r>
+              <a:t>•  D5: Credits Collection (Khata)</a:t>
+            </a:r>
+          </a:p>
+          <a:p>
+            <a:pPr>
+              <a:spcAft>
+                <a:spcPts val="500"/>
+              </a:spcAft>
+              <a:defRPr sz="1150">
                 <a:solidFill>
                   <a:srgbClr val="0F172A"/>
                 </a:solidFill>
@@ -4416,9 +4416,9 @@
           <a:p>
             <a:pPr>
               <a:spcAft>
-                <a:spcPts val="600"/>
-              </a:spcAft>
-              <a:defRPr sz="1200">
+                <a:spcPts val="500"/>
+              </a:spcAft>
+              <a:defRPr sz="1150">
                 <a:solidFill>
                   <a:srgbClr val="0F172A"/>
                 </a:solidFill>
@@ -4432,9 +4432,9 @@
           <a:p>
             <a:pPr>
               <a:spcAft>
-                <a:spcPts val="600"/>
-              </a:spcAft>
-              <a:defRPr sz="1200">
+                <a:spcPts val="500"/>
+              </a:spcAft>
+              <a:defRPr sz="1150">
                 <a:solidFill>
                   <a:srgbClr val="0F172A"/>
                 </a:solidFill>
@@ -4448,25 +4448,25 @@
           <a:p>
             <a:pPr>
               <a:spcAft>
-                <a:spcPts val="600"/>
-              </a:spcAft>
-              <a:defRPr sz="1200">
-                <a:solidFill>
-                  <a:srgbClr val="0F172A"/>
-                </a:solidFill>
-                <a:latin typeface="Arial"/>
-              </a:defRPr>
-            </a:pPr>
-            <a:r>
-              <a:t>•  Payment Collection:</a:t>
-            </a:r>
-          </a:p>
-          <a:p>
-            <a:pPr>
-              <a:spcAft>
-                <a:spcPts val="600"/>
-              </a:spcAft>
-              <a:defRPr sz="1200">
+                <a:spcPts val="500"/>
+              </a:spcAft>
+              <a:defRPr sz="1150">
+                <a:solidFill>
+                  <a:srgbClr val="0F172A"/>
+                </a:solidFill>
+                <a:latin typeface="Arial"/>
+              </a:defRPr>
+            </a:pPr>
+            <a:r>
+              <a:t>•  D6: Payments Collection</a:t>
+            </a:r>
+          </a:p>
+          <a:p>
+            <a:pPr>
+              <a:spcAft>
+                <a:spcPts val="500"/>
+              </a:spcAft>
+              <a:defRPr sz="1150">
                 <a:solidFill>
                   <a:srgbClr val="0F172A"/>
                 </a:solidFill>
@@ -4480,9 +4480,9 @@
           <a:p>
             <a:pPr>
               <a:spcAft>
-                <a:spcPts val="600"/>
-              </a:spcAft>
-              <a:defRPr sz="1200">
+                <a:spcPts val="500"/>
+              </a:spcAft>
+              <a:defRPr sz="1150">
                 <a:solidFill>
                   <a:srgbClr val="0F172A"/>
                 </a:solidFill>
@@ -4496,25 +4496,25 @@
           <a:p>
             <a:pPr>
               <a:spcAft>
-                <a:spcPts val="600"/>
-              </a:spcAft>
-              <a:defRPr sz="1200">
-                <a:solidFill>
-                  <a:srgbClr val="0F172A"/>
-                </a:solidFill>
-                <a:latin typeface="Arial"/>
-              </a:defRPr>
-            </a:pPr>
-            <a:r>
-              <a:t>•  Return Collection:</a:t>
-            </a:r>
-          </a:p>
-          <a:p>
-            <a:pPr>
-              <a:spcAft>
-                <a:spcPts val="600"/>
-              </a:spcAft>
-              <a:defRPr sz="1200">
+                <a:spcPts val="500"/>
+              </a:spcAft>
+              <a:defRPr sz="1150">
+                <a:solidFill>
+                  <a:srgbClr val="0F172A"/>
+                </a:solidFill>
+                <a:latin typeface="Arial"/>
+              </a:defRPr>
+            </a:pPr>
+            <a:r>
+              <a:t>•  D7: Returns Collection</a:t>
+            </a:r>
+          </a:p>
+          <a:p>
+            <a:pPr>
+              <a:spcAft>
+                <a:spcPts val="500"/>
+              </a:spcAft>
+              <a:defRPr sz="1150">
                 <a:solidFill>
                   <a:srgbClr val="0F172A"/>
                 </a:solidFill>
@@ -4568,7 +4568,7 @@
           <a:lstStyle/>
           <a:p>
             <a:pPr>
-              <a:defRPr sz="1100" b="1">
+              <a:defRPr sz="1050" b="1">
                 <a:solidFill>
                   <a:srgbClr val="0284C7"/>
                 </a:solidFill>
@@ -4576,12 +4576,12 @@
               </a:defRPr>
             </a:pPr>
             <a:r>
-              <a:t>MAJOR PROJECT PRESENTATION</a:t>
-            </a:r>
-          </a:p>
-          <a:p>
-            <a:pPr>
-              <a:defRPr sz="2400" b="1">
+              <a:t>MCA 3RD SEMESTER MINI PROJECT PRESENTATION</a:t>
+            </a:r>
+          </a:p>
+          <a:p>
+            <a:pPr>
+              <a:defRPr sz="2300" b="1">
                 <a:solidFill>
                   <a:srgbClr val="1E3A8A"/>
                 </a:solidFill>
@@ -4589,7 +4589,7 @@
               </a:defRPr>
             </a:pPr>
             <a:r>
-              <a:t>Security Hardening &amp; ACID Atomicity</a:t>
+              <a:t>Security &amp; Transactional Reliability</a:t>
             </a:r>
           </a:p>
         </p:txBody>
@@ -4708,9 +4708,9 @@
           <a:p>
             <a:pPr>
               <a:spcAft>
-                <a:spcPts val="1000"/>
-              </a:spcAft>
-              <a:defRPr sz="1500" b="1">
+                <a:spcPts val="800"/>
+              </a:spcAft>
+              <a:defRPr sz="1450" b="1">
                 <a:solidFill>
                   <a:srgbClr val="16A34A"/>
                 </a:solidFill>
@@ -4718,47 +4718,47 @@
               </a:defRPr>
             </a:pPr>
             <a:r>
-              <a:t>Database Atomicity &amp; Rollback Protection</a:t>
-            </a:r>
-          </a:p>
-          <a:p>
-            <a:pPr>
-              <a:spcAft>
-                <a:spcPts val="600"/>
-              </a:spcAft>
-              <a:defRPr sz="1200">
-                <a:solidFill>
-                  <a:srgbClr val="0F172A"/>
-                </a:solidFill>
-                <a:latin typeface="Arial"/>
-              </a:defRPr>
-            </a:pPr>
-            <a:r>
-              <a:t>•  Multi-Document Transactions: Wrapped in session.withTransaction() so failures trigger complete rollback.</a:t>
-            </a:r>
-          </a:p>
-          <a:p>
-            <a:pPr>
-              <a:spcAft>
-                <a:spcPts val="600"/>
-              </a:spcAft>
-              <a:defRPr sz="1200">
-                <a:solidFill>
-                  <a:srgbClr val="0F172A"/>
-                </a:solidFill>
-                <a:latin typeface="Arial"/>
-              </a:defRPr>
-            </a:pPr>
-            <a:r>
-              <a:t>•  Zero Orphan Records: If customer balance update fails, sale and payment records are never committed.</a:t>
-            </a:r>
-          </a:p>
-          <a:p>
-            <a:pPr>
-              <a:spcAft>
-                <a:spcPts val="600"/>
-              </a:spcAft>
-              <a:defRPr sz="1200">
+              <a:t>Database Atomicity (ACID Rollbacks)</a:t>
+            </a:r>
+          </a:p>
+          <a:p>
+            <a:pPr>
+              <a:spcAft>
+                <a:spcPts val="500"/>
+              </a:spcAft>
+              <a:defRPr sz="1150">
+                <a:solidFill>
+                  <a:srgbClr val="0F172A"/>
+                </a:solidFill>
+                <a:latin typeface="Arial"/>
+              </a:defRPr>
+            </a:pPr>
+            <a:r>
+              <a:t>•  Multi-Document Transactions: Wrapped in session.withTransaction() so errors trigger complete rollback.</a:t>
+            </a:r>
+          </a:p>
+          <a:p>
+            <a:pPr>
+              <a:spcAft>
+                <a:spcPts val="500"/>
+              </a:spcAft>
+              <a:defRPr sz="1150">
+                <a:solidFill>
+                  <a:srgbClr val="0F172A"/>
+                </a:solidFill>
+                <a:latin typeface="Arial"/>
+              </a:defRPr>
+            </a:pPr>
+            <a:r>
+              <a:t>•  Zero Corrupted Ledgers: If balance update fails, sale and payment records are rolled back automatically.</a:t>
+            </a:r>
+          </a:p>
+          <a:p>
+            <a:pPr>
+              <a:spcAft>
+                <a:spcPts val="500"/>
+              </a:spcAft>
+              <a:defRPr sz="1150">
                 <a:solidFill>
                   <a:srgbClr val="0F172A"/>
                 </a:solidFill>
@@ -4772,9 +4772,9 @@
           <a:p>
             <a:pPr>
               <a:spcAft>
-                <a:spcPts val="600"/>
-              </a:spcAft>
-              <a:defRPr sz="1200">
+                <a:spcPts val="500"/>
+              </a:spcAft>
+              <a:defRPr sz="1150">
                 <a:solidFill>
                   <a:srgbClr val="0F172A"/>
                 </a:solidFill>
@@ -4856,9 +4856,9 @@
           <a:p>
             <a:pPr>
               <a:spcAft>
-                <a:spcPts val="1000"/>
-              </a:spcAft>
-              <a:defRPr sz="1500" b="1">
+                <a:spcPts val="800"/>
+              </a:spcAft>
+              <a:defRPr sz="1450" b="1">
                 <a:solidFill>
                   <a:srgbClr val="1E3A8A"/>
                 </a:solidFill>
@@ -4872,25 +4872,25 @@
           <a:p>
             <a:pPr>
               <a:spcAft>
-                <a:spcPts val="600"/>
-              </a:spcAft>
-              <a:defRPr sz="1200">
-                <a:solidFill>
-                  <a:srgbClr val="0F172A"/>
-                </a:solidFill>
-                <a:latin typeface="Arial"/>
-              </a:defRPr>
-            </a:pPr>
-            <a:r>
-              <a:t>•  Stateless JWT Verification: Cryptographically signed tokens with secure expiration timestamps.</a:t>
-            </a:r>
-          </a:p>
-          <a:p>
-            <a:pPr>
-              <a:spcAft>
-                <a:spcPts val="600"/>
-              </a:spcAft>
-              <a:defRPr sz="1200">
+                <a:spcPts val="500"/>
+              </a:spcAft>
+              <a:defRPr sz="1150">
+                <a:solidFill>
+                  <a:srgbClr val="0F172A"/>
+                </a:solidFill>
+                <a:latin typeface="Arial"/>
+              </a:defRPr>
+            </a:pPr>
+            <a:r>
+              <a:t>•  Stateless JWT Tokens: Secure JSON Web Tokens with cryptographically signed payloads.</a:t>
+            </a:r>
+          </a:p>
+          <a:p>
+            <a:pPr>
+              <a:spcAft>
+                <a:spcPts val="500"/>
+              </a:spcAft>
+              <a:defRPr sz="1150">
                 <a:solidFill>
                   <a:srgbClr val="0F172A"/>
                 </a:solidFill>
@@ -4904,9 +4904,9 @@
           <a:p>
             <a:pPr>
               <a:spcAft>
-                <a:spcPts val="600"/>
-              </a:spcAft>
-              <a:defRPr sz="1200">
+                <a:spcPts val="500"/>
+              </a:spcAft>
+              <a:defRPr sz="1150">
                 <a:solidFill>
                   <a:srgbClr val="0F172A"/>
                 </a:solidFill>
@@ -4920,9 +4920,9 @@
           <a:p>
             <a:pPr>
               <a:spcAft>
-                <a:spcPts val="600"/>
-              </a:spcAft>
-              <a:defRPr sz="1200">
+                <a:spcPts val="500"/>
+              </a:spcAft>
+              <a:defRPr sz="1150">
                 <a:solidFill>
                   <a:srgbClr val="0F172A"/>
                 </a:solidFill>
@@ -4976,7 +4976,7 @@
           <a:lstStyle/>
           <a:p>
             <a:pPr>
-              <a:defRPr sz="1100" b="1">
+              <a:defRPr sz="1050" b="1">
                 <a:solidFill>
                   <a:srgbClr val="0284C7"/>
                 </a:solidFill>
@@ -4984,12 +4984,12 @@
               </a:defRPr>
             </a:pPr>
             <a:r>
-              <a:t>MAJOR PROJECT PRESENTATION</a:t>
-            </a:r>
-          </a:p>
-          <a:p>
-            <a:pPr>
-              <a:defRPr sz="2400" b="1">
+              <a:t>MCA 3RD SEMESTER MINI PROJECT PRESENTATION</a:t>
+            </a:r>
+          </a:p>
+          <a:p>
+            <a:pPr>
+              <a:defRPr sz="2300" b="1">
                 <a:solidFill>
                   <a:srgbClr val="1E3A8A"/>
                 </a:solidFill>
@@ -4997,7 +4997,7 @@
               </a:defRPr>
             </a:pPr>
             <a:r>
-              <a:t>Key Advantages &amp; Business Impact</a:t>
+              <a:t>Key Advantages &amp; Project Impact</a:t>
             </a:r>
           </a:p>
         </p:txBody>
@@ -5116,9 +5116,9 @@
           <a:p>
             <a:pPr>
               <a:spcAft>
-                <a:spcPts val="1000"/>
-              </a:spcAft>
-              <a:defRPr sz="1500" b="1">
+                <a:spcPts val="800"/>
+              </a:spcAft>
+              <a:defRPr sz="1450" b="1">
                 <a:solidFill>
                   <a:srgbClr val="1E3A8A"/>
                 </a:solidFill>
@@ -5126,71 +5126,71 @@
               </a:defRPr>
             </a:pPr>
             <a:r>
-              <a:t>For Shop Owners (Admins)</a:t>
-            </a:r>
-          </a:p>
-          <a:p>
-            <a:pPr>
-              <a:spcAft>
-                <a:spcPts val="600"/>
-              </a:spcAft>
-              <a:defRPr sz="1200">
-                <a:solidFill>
-                  <a:srgbClr val="0F172A"/>
-                </a:solidFill>
-                <a:latin typeface="Arial"/>
-              </a:defRPr>
-            </a:pPr>
-            <a:r>
-              <a:t>•  90% reduction in billing time compared to manual receipt writing.</a:t>
-            </a:r>
-          </a:p>
-          <a:p>
-            <a:pPr>
-              <a:spcAft>
-                <a:spcPts val="600"/>
-              </a:spcAft>
-              <a:defRPr sz="1200">
-                <a:solidFill>
-                  <a:srgbClr val="0F172A"/>
-                </a:solidFill>
-                <a:latin typeface="Arial"/>
-              </a:defRPr>
-            </a:pPr>
-            <a:r>
-              <a:t>•  Zero revenue leakage from forgotten or disputed customer credit.</a:t>
-            </a:r>
-          </a:p>
-          <a:p>
-            <a:pPr>
-              <a:spcAft>
-                <a:spcPts val="600"/>
-              </a:spcAft>
-              <a:defRPr sz="1200">
-                <a:solidFill>
-                  <a:srgbClr val="0F172A"/>
-                </a:solidFill>
-                <a:latin typeface="Arial"/>
-              </a:defRPr>
-            </a:pPr>
-            <a:r>
-              <a:t>•  Automated stock alerts prevent product stockouts.</a:t>
-            </a:r>
-          </a:p>
-          <a:p>
-            <a:pPr>
-              <a:spcAft>
-                <a:spcPts val="600"/>
-              </a:spcAft>
-              <a:defRPr sz="1200">
-                <a:solidFill>
-                  <a:srgbClr val="0F172A"/>
-                </a:solidFill>
-                <a:latin typeface="Arial"/>
-              </a:defRPr>
-            </a:pPr>
-            <a:r>
-              <a:t>•  Audit trail prevents internal staff mishandling.</a:t>
+              <a:t>For Shopkeepers (Admins)</a:t>
+            </a:r>
+          </a:p>
+          <a:p>
+            <a:pPr>
+              <a:spcAft>
+                <a:spcPts val="500"/>
+              </a:spcAft>
+              <a:defRPr sz="1150">
+                <a:solidFill>
+                  <a:srgbClr val="0F172A"/>
+                </a:solidFill>
+                <a:latin typeface="Arial"/>
+              </a:defRPr>
+            </a:pPr>
+            <a:r>
+              <a:t>•  Over 80% faster counter billing compared to manual paper slips.</a:t>
+            </a:r>
+          </a:p>
+          <a:p>
+            <a:pPr>
+              <a:spcAft>
+                <a:spcPts val="500"/>
+              </a:spcAft>
+              <a:defRPr sz="1150">
+                <a:solidFill>
+                  <a:srgbClr val="0F172A"/>
+                </a:solidFill>
+                <a:latin typeface="Arial"/>
+              </a:defRPr>
+            </a:pPr>
+            <a:r>
+              <a:t>•  Zero revenue loss from forgotten or disputed credit balances.</a:t>
+            </a:r>
+          </a:p>
+          <a:p>
+            <a:pPr>
+              <a:spcAft>
+                <a:spcPts val="500"/>
+              </a:spcAft>
+              <a:defRPr sz="1150">
+                <a:solidFill>
+                  <a:srgbClr val="0F172A"/>
+                </a:solidFill>
+                <a:latin typeface="Arial"/>
+              </a:defRPr>
+            </a:pPr>
+            <a:r>
+              <a:t>•  Live inventory tracking with out-of-stock indicators.</a:t>
+            </a:r>
+          </a:p>
+          <a:p>
+            <a:pPr>
+              <a:spcAft>
+                <a:spcPts val="500"/>
+              </a:spcAft>
+              <a:defRPr sz="1150">
+                <a:solidFill>
+                  <a:srgbClr val="0F172A"/>
+                </a:solidFill>
+                <a:latin typeface="Arial"/>
+              </a:defRPr>
+            </a:pPr>
+            <a:r>
+              <a:t>•  Full audit trail of all staff activities.</a:t>
             </a:r>
           </a:p>
         </p:txBody>
@@ -5264,9 +5264,9 @@
           <a:p>
             <a:pPr>
               <a:spcAft>
-                <a:spcPts val="1000"/>
-              </a:spcAft>
-              <a:defRPr sz="1500" b="1">
+                <a:spcPts val="800"/>
+              </a:spcAft>
+              <a:defRPr sz="1450" b="1">
                 <a:solidFill>
                   <a:srgbClr val="1E3A8A"/>
                 </a:solidFill>
@@ -5280,65 +5280,65 @@
           <a:p>
             <a:pPr>
               <a:spcAft>
-                <a:spcPts val="600"/>
-              </a:spcAft>
-              <a:defRPr sz="1200">
-                <a:solidFill>
-                  <a:srgbClr val="0F172A"/>
-                </a:solidFill>
-                <a:latin typeface="Arial"/>
-              </a:defRPr>
-            </a:pPr>
-            <a:r>
-              <a:t>•  24/7 access to personal digital khata ledger and bills.</a:t>
-            </a:r>
-          </a:p>
-          <a:p>
-            <a:pPr>
-              <a:spcAft>
-                <a:spcPts val="600"/>
-              </a:spcAft>
-              <a:defRPr sz="1200">
-                <a:solidFill>
-                  <a:srgbClr val="0F172A"/>
-                </a:solidFill>
-                <a:latin typeface="Arial"/>
-              </a:defRPr>
-            </a:pPr>
-            <a:r>
-              <a:t>•  Convenient online repayment options (UPI / QR / Razorpay).</a:t>
-            </a:r>
-          </a:p>
-          <a:p>
-            <a:pPr>
-              <a:spcAft>
-                <a:spcPts val="600"/>
-              </a:spcAft>
-              <a:defRPr sz="1200">
-                <a:solidFill>
-                  <a:srgbClr val="0F172A"/>
-                </a:solidFill>
-                <a:latin typeface="Arial"/>
-              </a:defRPr>
-            </a:pPr>
-            <a:r>
-              <a:t>•  Total transparency on dues, payments, and discounts.</a:t>
-            </a:r>
-          </a:p>
-          <a:p>
-            <a:pPr>
-              <a:spcAft>
-                <a:spcPts val="600"/>
-              </a:spcAft>
-              <a:defRPr sz="1200">
-                <a:solidFill>
-                  <a:srgbClr val="0F172A"/>
-                </a:solidFill>
-                <a:latin typeface="Arial"/>
-              </a:defRPr>
-            </a:pPr>
-            <a:r>
-              <a:t>•  No surprise charges or calculation disagreements.</a:t>
+                <a:spcPts val="500"/>
+              </a:spcAft>
+              <a:defRPr sz="1150">
+                <a:solidFill>
+                  <a:srgbClr val="0F172A"/>
+                </a:solidFill>
+                <a:latin typeface="Arial"/>
+              </a:defRPr>
+            </a:pPr>
+            <a:r>
+              <a:t>•  Browse catalog &amp; stock availability from home before visiting store.</a:t>
+            </a:r>
+          </a:p>
+          <a:p>
+            <a:pPr>
+              <a:spcAft>
+                <a:spcPts val="500"/>
+              </a:spcAft>
+              <a:defRPr sz="1150">
+                <a:solidFill>
+                  <a:srgbClr val="0F172A"/>
+                </a:solidFill>
+                <a:latin typeface="Arial"/>
+              </a:defRPr>
+            </a:pPr>
+            <a:r>
+              <a:t>•  24/7 access to personal purchase history and khata dues.</a:t>
+            </a:r>
+          </a:p>
+          <a:p>
+            <a:pPr>
+              <a:spcAft>
+                <a:spcPts val="500"/>
+              </a:spcAft>
+              <a:defRPr sz="1150">
+                <a:solidFill>
+                  <a:srgbClr val="0F172A"/>
+                </a:solidFill>
+                <a:latin typeface="Arial"/>
+              </a:defRPr>
+            </a:pPr>
+            <a:r>
+              <a:t>•  Flexible payment settlement (Cash, UPI, Online Gateway).</a:t>
+            </a:r>
+          </a:p>
+          <a:p>
+            <a:pPr>
+              <a:spcAft>
+                <a:spcPts val="500"/>
+              </a:spcAft>
+              <a:defRPr sz="1150">
+                <a:solidFill>
+                  <a:srgbClr val="0F172A"/>
+                </a:solidFill>
+                <a:latin typeface="Arial"/>
+              </a:defRPr>
+            </a:pPr>
+            <a:r>
+              <a:t>•  Total transparency on item prices, discounts, and payments.</a:t>
             </a:r>
           </a:p>
         </p:txBody>
@@ -5412,9 +5412,9 @@
           <a:p>
             <a:pPr>
               <a:spcAft>
-                <a:spcPts val="1000"/>
-              </a:spcAft>
-              <a:defRPr sz="1500" b="1">
+                <a:spcPts val="800"/>
+              </a:spcAft>
+              <a:defRPr sz="1450" b="1">
                 <a:solidFill>
                   <a:srgbClr val="1E3A8A"/>
                 </a:solidFill>
@@ -5422,31 +5422,31 @@
               </a:defRPr>
             </a:pPr>
             <a:r>
-              <a:t>Technical Superiority</a:t>
-            </a:r>
-          </a:p>
-          <a:p>
-            <a:pPr>
-              <a:spcAft>
-                <a:spcPts val="600"/>
-              </a:spcAft>
-              <a:defRPr sz="1200">
-                <a:solidFill>
-                  <a:srgbClr val="0F172A"/>
-                </a:solidFill>
-                <a:latin typeface="Arial"/>
-              </a:defRPr>
-            </a:pPr>
-            <a:r>
-              <a:t>•  100% web-based; works on any browser without installation.</a:t>
-            </a:r>
-          </a:p>
-          <a:p>
-            <a:pPr>
-              <a:spcAft>
-                <a:spcPts val="600"/>
-              </a:spcAft>
-              <a:defRPr sz="1200">
+              <a:t>Technical Strengths</a:t>
+            </a:r>
+          </a:p>
+          <a:p>
+            <a:pPr>
+              <a:spcAft>
+                <a:spcPts val="500"/>
+              </a:spcAft>
+              <a:defRPr sz="1150">
+                <a:solidFill>
+                  <a:srgbClr val="0F172A"/>
+                </a:solidFill>
+                <a:latin typeface="Arial"/>
+              </a:defRPr>
+            </a:pPr>
+            <a:r>
+              <a:t>•  100% Web-Based; works seamlessly on any modern device.</a:t>
+            </a:r>
+          </a:p>
+          <a:p>
+            <a:pPr>
+              <a:spcAft>
+                <a:spcPts val="500"/>
+              </a:spcAft>
+              <a:defRPr sz="1150">
                 <a:solidFill>
                   <a:srgbClr val="0F172A"/>
                 </a:solidFill>
@@ -5460,33 +5460,33 @@
           <a:p>
             <a:pPr>
               <a:spcAft>
-                <a:spcPts val="600"/>
-              </a:spcAft>
-              <a:defRPr sz="1200">
-                <a:solidFill>
-                  <a:srgbClr val="0F172A"/>
-                </a:solidFill>
-                <a:latin typeface="Arial"/>
-              </a:defRPr>
-            </a:pPr>
-            <a:r>
-              <a:t>•  Ultra-low infrastructure cost with cloud MongoDB &amp; Cloudinary.</a:t>
-            </a:r>
-          </a:p>
-          <a:p>
-            <a:pPr>
-              <a:spcAft>
-                <a:spcPts val="600"/>
-              </a:spcAft>
-              <a:defRPr sz="1200">
-                <a:solidFill>
-                  <a:srgbClr val="0F172A"/>
-                </a:solidFill>
-                <a:latin typeface="Arial"/>
-              </a:defRPr>
-            </a:pPr>
-            <a:r>
-              <a:t>•  High scalability for multiple retail branches.</a:t>
+                <a:spcPts val="500"/>
+              </a:spcAft>
+              <a:defRPr sz="1150">
+                <a:solidFill>
+                  <a:srgbClr val="0F172A"/>
+                </a:solidFill>
+                <a:latin typeface="Arial"/>
+              </a:defRPr>
+            </a:pPr>
+            <a:r>
+              <a:t>•  Scalable MERN stack architecture.</a:t>
+            </a:r>
+          </a:p>
+          <a:p>
+            <a:pPr>
+              <a:spcAft>
+                <a:spcPts val="500"/>
+              </a:spcAft>
+              <a:defRPr sz="1150">
+                <a:solidFill>
+                  <a:srgbClr val="0F172A"/>
+                </a:solidFill>
+                <a:latin typeface="Arial"/>
+              </a:defRPr>
+            </a:pPr>
+            <a:r>
+              <a:t>•  Production-ready stability (0 build errors).</a:t>
             </a:r>
           </a:p>
         </p:txBody>
@@ -5532,7 +5532,7 @@
           <a:lstStyle/>
           <a:p>
             <a:pPr>
-              <a:defRPr sz="1100" b="1">
+              <a:defRPr sz="1050" b="1">
                 <a:solidFill>
                   <a:srgbClr val="0284C7"/>
                 </a:solidFill>
@@ -5540,12 +5540,12 @@
               </a:defRPr>
             </a:pPr>
             <a:r>
-              <a:t>MAJOR PROJECT PRESENTATION</a:t>
-            </a:r>
-          </a:p>
-          <a:p>
-            <a:pPr>
-              <a:defRPr sz="2400" b="1">
+              <a:t>MCA 3RD SEMESTER MINI PROJECT PRESENTATION</a:t>
+            </a:r>
+          </a:p>
+          <a:p>
+            <a:pPr>
+              <a:defRPr sz="2300" b="1">
                 <a:solidFill>
                   <a:srgbClr val="1E3A8A"/>
                 </a:solidFill>
@@ -5672,9 +5672,9 @@
           <a:p>
             <a:pPr>
               <a:spcAft>
-                <a:spcPts val="1000"/>
-              </a:spcAft>
-              <a:defRPr sz="1500" b="1">
+                <a:spcPts val="800"/>
+              </a:spcAft>
+              <a:defRPr sz="1450" b="1">
                 <a:solidFill>
                   <a:srgbClr val="1E3A8A"/>
                 </a:solidFill>
@@ -5682,87 +5682,71 @@
               </a:defRPr>
             </a:pPr>
             <a:r>
-              <a:t>Future Scope &amp; Enhancements</a:t>
-            </a:r>
-          </a:p>
-          <a:p>
-            <a:pPr>
-              <a:spcAft>
-                <a:spcPts val="600"/>
-              </a:spcAft>
-              <a:defRPr sz="1200">
-                <a:solidFill>
-                  <a:srgbClr val="0F172A"/>
-                </a:solidFill>
-                <a:latin typeface="Arial"/>
-              </a:defRPr>
-            </a:pPr>
-            <a:r>
-              <a:t>•  Automated WhatsApp / SMS Reminders for upcoming due dates.</a:t>
-            </a:r>
-          </a:p>
-          <a:p>
-            <a:pPr>
-              <a:spcAft>
-                <a:spcPts val="600"/>
-              </a:spcAft>
-              <a:defRPr sz="1200">
-                <a:solidFill>
-                  <a:srgbClr val="0F172A"/>
-                </a:solidFill>
-                <a:latin typeface="Arial"/>
-              </a:defRPr>
-            </a:pPr>
-            <a:r>
-              <a:t>•  Thermal POS Receipt Printer &amp; USB Barcode Scanner support.</a:t>
-            </a:r>
-          </a:p>
-          <a:p>
-            <a:pPr>
-              <a:spcAft>
-                <a:spcPts val="600"/>
-              </a:spcAft>
-              <a:defRPr sz="1200">
-                <a:solidFill>
-                  <a:srgbClr val="0F172A"/>
-                </a:solidFill>
-                <a:latin typeface="Arial"/>
-              </a:defRPr>
-            </a:pPr>
-            <a:r>
-              <a:t>•  Offline Progressive Web App (PWA) billing with IndexedDB sync.</a:t>
-            </a:r>
-          </a:p>
-          <a:p>
-            <a:pPr>
-              <a:spcAft>
-                <a:spcPts val="600"/>
-              </a:spcAft>
-              <a:defRPr sz="1200">
-                <a:solidFill>
-                  <a:srgbClr val="0F172A"/>
-                </a:solidFill>
-                <a:latin typeface="Arial"/>
-              </a:defRPr>
-            </a:pPr>
-            <a:r>
-              <a:t>•  AI-driven Sales &amp; Inventory demand forecasting.</a:t>
-            </a:r>
-          </a:p>
-          <a:p>
-            <a:pPr>
-              <a:spcAft>
-                <a:spcPts val="600"/>
-              </a:spcAft>
-              <a:defRPr sz="1200">
-                <a:solidFill>
-                  <a:srgbClr val="0F172A"/>
-                </a:solidFill>
-                <a:latin typeface="Arial"/>
-              </a:defRPr>
-            </a:pPr>
-            <a:r>
-              <a:t>•  Multi-branch Store Management from a single superadmin console.</a:t>
+              <a:t>Future Scope (Planned Enhancements)</a:t>
+            </a:r>
+          </a:p>
+          <a:p>
+            <a:pPr>
+              <a:spcAft>
+                <a:spcPts val="500"/>
+              </a:spcAft>
+              <a:defRPr sz="1150">
+                <a:solidFill>
+                  <a:srgbClr val="0F172A"/>
+                </a:solidFill>
+                <a:latin typeface="Arial"/>
+              </a:defRPr>
+            </a:pPr>
+            <a:r>
+              <a:t>•  OTP-Based Customer Login: Passwordless login via SMS/Email OTP for faster customer access.</a:t>
+            </a:r>
+          </a:p>
+          <a:p>
+            <a:pPr>
+              <a:spcAft>
+                <a:spcPts val="500"/>
+              </a:spcAft>
+              <a:defRPr sz="1150">
+                <a:solidFill>
+                  <a:srgbClr val="0F172A"/>
+                </a:solidFill>
+                <a:latin typeface="Arial"/>
+              </a:defRPr>
+            </a:pPr>
+            <a:r>
+              <a:t>•  OTP-Based Password Reset: Time-sensitive OTP verification for secure forgot password recovery.</a:t>
+            </a:r>
+          </a:p>
+          <a:p>
+            <a:pPr>
+              <a:spcAft>
+                <a:spcPts val="500"/>
+              </a:spcAft>
+              <a:defRPr sz="1150">
+                <a:solidFill>
+                  <a:srgbClr val="0F172A"/>
+                </a:solidFill>
+                <a:latin typeface="Arial"/>
+              </a:defRPr>
+            </a:pPr>
+            <a:r>
+              <a:t>•  WhatsApp / SMS Bill &amp; Due Alerts: Automated notifications for new bills and upcoming khata due dates.</a:t>
+            </a:r>
+          </a:p>
+          <a:p>
+            <a:pPr>
+              <a:spcAft>
+                <a:spcPts val="500"/>
+              </a:spcAft>
+              <a:defRPr sz="1150">
+                <a:solidFill>
+                  <a:srgbClr val="0F172A"/>
+                </a:solidFill>
+                <a:latin typeface="Arial"/>
+              </a:defRPr>
+            </a:pPr>
+            <a:r>
+              <a:t>•  Thermal POS Receipt Printing: Direct USB/Bluetooth printer support for instant billing slips.</a:t>
             </a:r>
           </a:p>
         </p:txBody>
@@ -5836,9 +5820,9 @@
           <a:p>
             <a:pPr>
               <a:spcAft>
-                <a:spcPts val="1000"/>
-              </a:spcAft>
-              <a:defRPr sz="1500" b="1">
+                <a:spcPts val="800"/>
+              </a:spcAft>
+              <a:defRPr sz="1450" b="1">
                 <a:solidFill>
                   <a:srgbClr val="1E3A8A"/>
                 </a:solidFill>
@@ -5852,65 +5836,65 @@
           <a:p>
             <a:pPr>
               <a:spcAft>
-                <a:spcPts val="600"/>
-              </a:spcAft>
-              <a:defRPr sz="1200">
-                <a:solidFill>
-                  <a:srgbClr val="0F172A"/>
-                </a:solidFill>
-                <a:latin typeface="Arial"/>
-              </a:defRPr>
-            </a:pPr>
-            <a:r>
-              <a:t>•  SmartShop successfully bridges the gap between traditional retail credit practices and modern cloud technology.</a:t>
-            </a:r>
-          </a:p>
-          <a:p>
-            <a:pPr>
-              <a:spcAft>
-                <a:spcPts val="600"/>
-              </a:spcAft>
-              <a:defRPr sz="1200">
-                <a:solidFill>
-                  <a:srgbClr val="0F172A"/>
-                </a:solidFill>
-                <a:latin typeface="Arial"/>
-              </a:defRPr>
-            </a:pPr>
-            <a:r>
-              <a:t>•  Provides a robust, reliable, and user-friendly digital ecosystem for shop owners and customers alike.</a:t>
-            </a:r>
-          </a:p>
-          <a:p>
-            <a:pPr>
-              <a:spcAft>
-                <a:spcPts val="600"/>
-              </a:spcAft>
-              <a:defRPr sz="1200">
-                <a:solidFill>
-                  <a:srgbClr val="0F172A"/>
-                </a:solidFill>
-                <a:latin typeface="Arial"/>
-              </a:defRPr>
-            </a:pPr>
-            <a:r>
-              <a:t>•  Delivers production-ready stability with verified zero-error frontend and admin builds.</a:t>
-            </a:r>
-          </a:p>
-          <a:p>
-            <a:pPr>
-              <a:spcAft>
-                <a:spcPts val="600"/>
-              </a:spcAft>
-              <a:defRPr sz="1200">
-                <a:solidFill>
-                  <a:srgbClr val="0F172A"/>
-                </a:solidFill>
-                <a:latin typeface="Arial"/>
-              </a:defRPr>
-            </a:pPr>
-            <a:r>
-              <a:t>•  Demonstrates practical application of fullstack MERN engineering, transaction management, and responsive UI design.</a:t>
+                <a:spcPts val="500"/>
+              </a:spcAft>
+              <a:defRPr sz="1150">
+                <a:solidFill>
+                  <a:srgbClr val="0F172A"/>
+                </a:solidFill>
+                <a:latin typeface="Arial"/>
+              </a:defRPr>
+            </a:pPr>
+            <a:r>
+              <a:t>•  SmartShop successfully bridges the gap between traditional retail credit management and modern web technology.</a:t>
+            </a:r>
+          </a:p>
+          <a:p>
+            <a:pPr>
+              <a:spcAft>
+                <a:spcPts val="500"/>
+              </a:spcAft>
+              <a:defRPr sz="1150">
+                <a:solidFill>
+                  <a:srgbClr val="0F172A"/>
+                </a:solidFill>
+                <a:latin typeface="Arial"/>
+              </a:defRPr>
+            </a:pPr>
+            <a:r>
+              <a:t>•  Replaces fragile paper ledgers with an ACID-compliant, transparent digital ledger platform.</a:t>
+            </a:r>
+          </a:p>
+          <a:p>
+            <a:pPr>
+              <a:spcAft>
+                <a:spcPts val="500"/>
+              </a:spcAft>
+              <a:defRPr sz="1150">
+                <a:solidFill>
+                  <a:srgbClr val="0F172A"/>
+                </a:solidFill>
+                <a:latin typeface="Arial"/>
+              </a:defRPr>
+            </a:pPr>
+            <a:r>
+              <a:t>•  Successfully fulfills all functional requirements for an MCA 3rd Semester Mini Project.</a:t>
+            </a:r>
+          </a:p>
+          <a:p>
+            <a:pPr>
+              <a:spcAft>
+                <a:spcPts val="500"/>
+              </a:spcAft>
+              <a:defRPr sz="1150">
+                <a:solidFill>
+                  <a:srgbClr val="0F172A"/>
+                </a:solidFill>
+                <a:latin typeface="Arial"/>
+              </a:defRPr>
+            </a:pPr>
+            <a:r>
+              <a:t>•  Demonstrates practical fullstack engineering with React 19, Node.js, Express, and MongoDB.</a:t>
             </a:r>
           </a:p>
         </p:txBody>
@@ -6085,7 +6069,7 @@
           <a:lstStyle/>
           <a:p>
             <a:pPr>
-              <a:defRPr sz="1100" b="1">
+              <a:defRPr sz="1050" b="1">
                 <a:solidFill>
                   <a:srgbClr val="0284C7"/>
                 </a:solidFill>
@@ -6093,12 +6077,12 @@
               </a:defRPr>
             </a:pPr>
             <a:r>
-              <a:t>MAJOR PROJECT PRESENTATION</a:t>
-            </a:r>
-          </a:p>
-          <a:p>
-            <a:pPr>
-              <a:defRPr sz="2400" b="1">
+              <a:t>MCA 3RD SEMESTER MINI PROJECT PRESENTATION</a:t>
+            </a:r>
+          </a:p>
+          <a:p>
+            <a:pPr>
+              <a:defRPr sz="2300" b="1">
                 <a:solidFill>
                   <a:srgbClr val="1E3A8A"/>
                 </a:solidFill>
@@ -6106,7 +6090,7 @@
               </a:defRPr>
             </a:pPr>
             <a:r>
-              <a:t>Project Overview &amp; Executive Summary</a:t>
+              <a:t>Project Overview &amp; Key Highlights</a:t>
             </a:r>
           </a:p>
         </p:txBody>
@@ -6225,9 +6209,9 @@
           <a:p>
             <a:pPr>
               <a:spcAft>
-                <a:spcPts val="1000"/>
-              </a:spcAft>
-              <a:defRPr sz="1500" b="1">
+                <a:spcPts val="800"/>
+              </a:spcAft>
+              <a:defRPr sz="1450" b="1">
                 <a:solidFill>
                   <a:srgbClr val="1E3A8A"/>
                 </a:solidFill>
@@ -6241,65 +6225,65 @@
           <a:p>
             <a:pPr>
               <a:spcAft>
-                <a:spcPts val="600"/>
-              </a:spcAft>
-              <a:defRPr sz="1200">
-                <a:solidFill>
-                  <a:srgbClr val="0F172A"/>
-                </a:solidFill>
-                <a:latin typeface="Arial"/>
-              </a:defRPr>
-            </a:pPr>
-            <a:r>
-              <a:t>•  SmartShop is a cloud-based web application tailored for retail stores, supermarkets, and general merchants.</a:t>
-            </a:r>
-          </a:p>
-          <a:p>
-            <a:pPr>
-              <a:spcAft>
-                <a:spcPts val="600"/>
-              </a:spcAft>
-              <a:defRPr sz="1200">
-                <a:solidFill>
-                  <a:srgbClr val="0F172A"/>
-                </a:solidFill>
-                <a:latin typeface="Arial"/>
-              </a:defRPr>
-            </a:pPr>
-            <a:r>
-              <a:t>•  Combines high-speed Point-of-Sale (POS) counter billing with an integrated digital customer ledger ('Khata').</a:t>
-            </a:r>
-          </a:p>
-          <a:p>
-            <a:pPr>
-              <a:spcAft>
-                <a:spcPts val="600"/>
-              </a:spcAft>
-              <a:defRPr sz="1200">
-                <a:solidFill>
-                  <a:srgbClr val="0F172A"/>
-                </a:solidFill>
-                <a:latin typeface="Arial"/>
-              </a:defRPr>
-            </a:pPr>
-            <a:r>
-              <a:t>•  Eliminates paper registers by automatically recording customer dues, trust ratings, borrow limits, and settlements.</a:t>
-            </a:r>
-          </a:p>
-          <a:p>
-            <a:pPr>
-              <a:spcAft>
-                <a:spcPts val="600"/>
-              </a:spcAft>
-              <a:defRPr sz="1200">
-                <a:solidFill>
-                  <a:srgbClr val="0F172A"/>
-                </a:solidFill>
-                <a:latin typeface="Arial"/>
-              </a:defRPr>
-            </a:pPr>
-            <a:r>
-              <a:t>•  Includes full customer self-service access to monitor dues, view purchases, and submit payments.</a:t>
+                <a:spcPts val="500"/>
+              </a:spcAft>
+              <a:defRPr sz="1150">
+                <a:solidFill>
+                  <a:srgbClr val="0F172A"/>
+                </a:solidFill>
+                <a:latin typeface="Arial"/>
+              </a:defRPr>
+            </a:pPr>
+            <a:r>
+              <a:t>•  A cloud-based web application tailored for neighborhood retail stores, supermarkets, and provision shops.</a:t>
+            </a:r>
+          </a:p>
+          <a:p>
+            <a:pPr>
+              <a:spcAft>
+                <a:spcPts val="500"/>
+              </a:spcAft>
+              <a:defRPr sz="1150">
+                <a:solidFill>
+                  <a:srgbClr val="0F172A"/>
+                </a:solidFill>
+                <a:latin typeface="Arial"/>
+              </a:defRPr>
+            </a:pPr>
+            <a:r>
+              <a:t>•  Solves the real-world problem of customers not knowing item availability by letting them check live stock from home.</a:t>
+            </a:r>
+          </a:p>
+          <a:p>
+            <a:pPr>
+              <a:spcAft>
+                <a:spcPts val="500"/>
+              </a:spcAft>
+              <a:defRPr sz="1150">
+                <a:solidFill>
+                  <a:srgbClr val="0F172A"/>
+                </a:solidFill>
+                <a:latin typeface="Arial"/>
+              </a:defRPr>
+            </a:pPr>
+            <a:r>
+              <a:t>•  Integrates high-speed Point-of-Sale (POS) counter billing with a digital Customer Credit Ledger ('Khata').</a:t>
+            </a:r>
+          </a:p>
+          <a:p>
+            <a:pPr>
+              <a:spcAft>
+                <a:spcPts val="500"/>
+              </a:spcAft>
+              <a:defRPr sz="1150">
+                <a:solidFill>
+                  <a:srgbClr val="0F172A"/>
+                </a:solidFill>
+                <a:latin typeface="Arial"/>
+              </a:defRPr>
+            </a:pPr>
+            <a:r>
+              <a:t>•  Replaces physical paper notebooks with real-time cloud data storage and automatic calculations.</a:t>
             </a:r>
           </a:p>
         </p:txBody>
@@ -6373,9 +6357,9 @@
           <a:p>
             <a:pPr>
               <a:spcAft>
-                <a:spcPts val="1000"/>
-              </a:spcAft>
-              <a:defRPr sz="1500" b="1">
+                <a:spcPts val="800"/>
+              </a:spcAft>
+              <a:defRPr sz="1450" b="1">
                 <a:solidFill>
                   <a:srgbClr val="1E3A8A"/>
                 </a:solidFill>
@@ -6383,71 +6367,71 @@
               </a:defRPr>
             </a:pPr>
             <a:r>
-              <a:t>Core Value Proposition</a:t>
-            </a:r>
-          </a:p>
-          <a:p>
-            <a:pPr>
-              <a:spcAft>
-                <a:spcPts val="600"/>
-              </a:spcAft>
-              <a:defRPr sz="1200">
-                <a:solidFill>
-                  <a:srgbClr val="0F172A"/>
-                </a:solidFill>
-                <a:latin typeface="Arial"/>
-              </a:defRPr>
-            </a:pPr>
-            <a:r>
-              <a:t>•  Zero Data Loss: Replaces fragile paper bahi-khata with cloud storage and automated daily backups.</a:t>
-            </a:r>
-          </a:p>
-          <a:p>
-            <a:pPr>
-              <a:spcAft>
-                <a:spcPts val="600"/>
-              </a:spcAft>
-              <a:defRPr sz="1200">
-                <a:solidFill>
-                  <a:srgbClr val="0F172A"/>
-                </a:solidFill>
-                <a:latin typeface="Arial"/>
-              </a:defRPr>
-            </a:pPr>
-            <a:r>
-              <a:t>•  Transparent Customer Ledger: Real-time itemized bills visible directly on customers' mobile phones.</a:t>
-            </a:r>
-          </a:p>
-          <a:p>
-            <a:pPr>
-              <a:spcAft>
-                <a:spcPts val="600"/>
-              </a:spcAft>
-              <a:defRPr sz="1200">
-                <a:solidFill>
-                  <a:srgbClr val="0F172A"/>
-                </a:solidFill>
-                <a:latin typeface="Arial"/>
-              </a:defRPr>
-            </a:pPr>
-            <a:r>
-              <a:t>•  Automated Returns &amp; Restocking: Full and partial item returns automatically adjust inventory and debts.</a:t>
-            </a:r>
-          </a:p>
-          <a:p>
-            <a:pPr>
-              <a:spcAft>
-                <a:spcPts val="600"/>
-              </a:spcAft>
-              <a:defRPr sz="1200">
-                <a:solidFill>
-                  <a:srgbClr val="0F172A"/>
-                </a:solidFill>
-                <a:latin typeface="Arial"/>
-              </a:defRPr>
-            </a:pPr>
-            <a:r>
-              <a:t>•  Multi-Channel Settlements: Supports Cash, manual UPI with screenshot verification, and Razorpay gateway.</a:t>
+              <a:t>Core Value Delivered</a:t>
+            </a:r>
+          </a:p>
+          <a:p>
+            <a:pPr>
+              <a:spcAft>
+                <a:spcPts val="500"/>
+              </a:spcAft>
+              <a:defRPr sz="1150">
+                <a:solidFill>
+                  <a:srgbClr val="0F172A"/>
+                </a:solidFill>
+                <a:latin typeface="Arial"/>
+              </a:defRPr>
+            </a:pPr>
+            <a:r>
+              <a:t>•  Home Stock Availability: Customers browse categories, prices, and stock indicators before visiting the shop.</a:t>
+            </a:r>
+          </a:p>
+          <a:p>
+            <a:pPr>
+              <a:spcAft>
+                <a:spcPts val="500"/>
+              </a:spcAft>
+              <a:defRPr sz="1150">
+                <a:solidFill>
+                  <a:srgbClr val="0F172A"/>
+                </a:solidFill>
+                <a:latin typeface="Arial"/>
+              </a:defRPr>
+            </a:pPr>
+            <a:r>
+              <a:t>•  Multi-Mode POS Billing: Supports Cash, UPI, Credit (Khata), and Partial payment combinations.</a:t>
+            </a:r>
+          </a:p>
+          <a:p>
+            <a:pPr>
+              <a:spcAft>
+                <a:spcPts val="500"/>
+              </a:spcAft>
+              <a:defRPr sz="1150">
+                <a:solidFill>
+                  <a:srgbClr val="0F172A"/>
+                </a:solidFill>
+                <a:latin typeface="Arial"/>
+              </a:defRPr>
+            </a:pPr>
+            <a:r>
+              <a:t>•  Transparent Customer Ledger: 24/7 self-service portal to view itemized bills and settle pending dues.</a:t>
+            </a:r>
+          </a:p>
+          <a:p>
+            <a:pPr>
+              <a:spcAft>
+                <a:spcPts val="500"/>
+              </a:spcAft>
+              <a:defRPr sz="1150">
+                <a:solidFill>
+                  <a:srgbClr val="0F172A"/>
+                </a:solidFill>
+                <a:latin typeface="Arial"/>
+              </a:defRPr>
+            </a:pPr>
+            <a:r>
+              <a:t>•  Automated Returns &amp; Restocking: Full and partial product returns automatically adjust inventory and debt.</a:t>
             </a:r>
           </a:p>
         </p:txBody>
@@ -6493,7 +6477,7 @@
           <a:lstStyle/>
           <a:p>
             <a:pPr>
-              <a:defRPr sz="1100" b="1">
+              <a:defRPr sz="1050" b="1">
                 <a:solidFill>
                   <a:srgbClr val="0284C7"/>
                 </a:solidFill>
@@ -6501,12 +6485,12 @@
               </a:defRPr>
             </a:pPr>
             <a:r>
-              <a:t>MAJOR PROJECT PRESENTATION</a:t>
-            </a:r>
-          </a:p>
-          <a:p>
-            <a:pPr>
-              <a:defRPr sz="2400" b="1">
+              <a:t>MCA 3RD SEMESTER MINI PROJECT PRESENTATION</a:t>
+            </a:r>
+          </a:p>
+          <a:p>
+            <a:pPr>
+              <a:defRPr sz="2300" b="1">
                 <a:solidFill>
                   <a:srgbClr val="1E3A8A"/>
                 </a:solidFill>
@@ -6514,7 +6498,7 @@
               </a:defRPr>
             </a:pPr>
             <a:r>
-              <a:t>Problem Statement &amp; Need for Digitalization</a:t>
+              <a:t>Problem Statement &amp; Real-World Motivation</a:t>
             </a:r>
           </a:p>
         </p:txBody>
@@ -6633,9 +6617,9 @@
           <a:p>
             <a:pPr>
               <a:spcAft>
-                <a:spcPts val="1000"/>
-              </a:spcAft>
-              <a:defRPr sz="1500" b="1">
+                <a:spcPts val="800"/>
+              </a:spcAft>
+              <a:defRPr sz="1450" b="1">
                 <a:solidFill>
                   <a:srgbClr val="B91C1C"/>
                 </a:solidFill>
@@ -6643,71 +6627,55 @@
               </a:defRPr>
             </a:pPr>
             <a:r>
-              <a:t>Traditional Khata Issues</a:t>
-            </a:r>
-          </a:p>
-          <a:p>
-            <a:pPr>
-              <a:spcAft>
-                <a:spcPts val="600"/>
-              </a:spcAft>
-              <a:defRPr sz="1200">
-                <a:solidFill>
-                  <a:srgbClr val="0F172A"/>
-                </a:solidFill>
-                <a:latin typeface="Arial"/>
-              </a:defRPr>
-            </a:pPr>
-            <a:r>
-              <a:t>•  Manual arithmetic errors during daily ledger tallying.</a:t>
-            </a:r>
-          </a:p>
-          <a:p>
-            <a:pPr>
-              <a:spcAft>
-                <a:spcPts val="600"/>
-              </a:spcAft>
-              <a:defRPr sz="1200">
-                <a:solidFill>
-                  <a:srgbClr val="0F172A"/>
-                </a:solidFill>
-                <a:latin typeface="Arial"/>
-              </a:defRPr>
-            </a:pPr>
-            <a:r>
-              <a:t>•  Physical register damage, ink fading, or page loss.</a:t>
-            </a:r>
-          </a:p>
-          <a:p>
-            <a:pPr>
-              <a:spcAft>
-                <a:spcPts val="600"/>
-              </a:spcAft>
-              <a:defRPr sz="1200">
-                <a:solidFill>
-                  <a:srgbClr val="0F172A"/>
-                </a:solidFill>
-                <a:latin typeface="Arial"/>
-              </a:defRPr>
-            </a:pPr>
-            <a:r>
-              <a:t>•  Disputes over old unverified credit balances.</a:t>
-            </a:r>
-          </a:p>
-          <a:p>
-            <a:pPr>
-              <a:spcAft>
-                <a:spcPts val="600"/>
-              </a:spcAft>
-              <a:defRPr sz="1200">
-                <a:solidFill>
-                  <a:srgbClr val="0F172A"/>
-                </a:solidFill>
-                <a:latin typeface="Arial"/>
-              </a:defRPr>
-            </a:pPr>
-            <a:r>
-              <a:t>•  No automated notifications for overdue repayments.</a:t>
+              <a:t>1. Customer Inconvenience</a:t>
+            </a:r>
+          </a:p>
+          <a:p>
+            <a:pPr>
+              <a:spcAft>
+                <a:spcPts val="500"/>
+              </a:spcAft>
+              <a:defRPr sz="1150">
+                <a:solidFill>
+                  <a:srgbClr val="0F172A"/>
+                </a:solidFill>
+                <a:latin typeface="Arial"/>
+              </a:defRPr>
+            </a:pPr>
+            <a:r>
+              <a:t>•  Customers walk to the shop only to find essential grocery items out of stock.</a:t>
+            </a:r>
+          </a:p>
+          <a:p>
+            <a:pPr>
+              <a:spcAft>
+                <a:spcPts val="500"/>
+              </a:spcAft>
+              <a:defRPr sz="1150">
+                <a:solidFill>
+                  <a:srgbClr val="0F172A"/>
+                </a:solidFill>
+                <a:latin typeface="Arial"/>
+              </a:defRPr>
+            </a:pPr>
+            <a:r>
+              <a:t>•  No quick way to verify current item prices or stock levels from home.</a:t>
+            </a:r>
+          </a:p>
+          <a:p>
+            <a:pPr>
+              <a:spcAft>
+                <a:spcPts val="500"/>
+              </a:spcAft>
+              <a:defRPr sz="1150">
+                <a:solidFill>
+                  <a:srgbClr val="0F172A"/>
+                </a:solidFill>
+                <a:latin typeface="Arial"/>
+              </a:defRPr>
+            </a:pPr>
+            <a:r>
+              <a:t>•  Wasted physical trips and poor customer shopping experience.</a:t>
             </a:r>
           </a:p>
         </p:txBody>
@@ -6781,9 +6749,9 @@
           <a:p>
             <a:pPr>
               <a:spcAft>
-                <a:spcPts val="1000"/>
-              </a:spcAft>
-              <a:defRPr sz="1500" b="1">
+                <a:spcPts val="800"/>
+              </a:spcAft>
+              <a:defRPr sz="1450" b="1">
                 <a:solidFill>
                   <a:srgbClr val="B45309"/>
                 </a:solidFill>
@@ -6791,71 +6759,71 @@
               </a:defRPr>
             </a:pPr>
             <a:r>
-              <a:t>Standalone POS Limitations</a:t>
-            </a:r>
-          </a:p>
-          <a:p>
-            <a:pPr>
-              <a:spcAft>
-                <a:spcPts val="600"/>
-              </a:spcAft>
-              <a:defRPr sz="1200">
-                <a:solidFill>
-                  <a:srgbClr val="0F172A"/>
-                </a:solidFill>
-                <a:latin typeface="Arial"/>
-              </a:defRPr>
-            </a:pPr>
-            <a:r>
-              <a:t>•  Existing POS systems focus only on instant cash/card billing.</a:t>
-            </a:r>
-          </a:p>
-          <a:p>
-            <a:pPr>
-              <a:spcAft>
-                <a:spcPts val="600"/>
-              </a:spcAft>
-              <a:defRPr sz="1200">
-                <a:solidFill>
-                  <a:srgbClr val="0F172A"/>
-                </a:solidFill>
-                <a:latin typeface="Arial"/>
-              </a:defRPr>
-            </a:pPr>
-            <a:r>
-              <a:t>•  Cannot manage customer credit accounts or udhar history.</a:t>
-            </a:r>
-          </a:p>
-          <a:p>
-            <a:pPr>
-              <a:spcAft>
-                <a:spcPts val="600"/>
-              </a:spcAft>
-              <a:defRPr sz="1200">
-                <a:solidFill>
-                  <a:srgbClr val="0F172A"/>
-                </a:solidFill>
-                <a:latin typeface="Arial"/>
-              </a:defRPr>
-            </a:pPr>
-            <a:r>
-              <a:t>•  Require expensive proprietary hardware and setup.</a:t>
-            </a:r>
-          </a:p>
-          <a:p>
-            <a:pPr>
-              <a:spcAft>
-                <a:spcPts val="600"/>
-              </a:spcAft>
-              <a:defRPr sz="1200">
-                <a:solidFill>
-                  <a:srgbClr val="0F172A"/>
-                </a:solidFill>
-                <a:latin typeface="Arial"/>
-              </a:defRPr>
-            </a:pPr>
-            <a:r>
-              <a:t>•  Complex, non-intuitive interfaces for retail staff.</a:t>
+              <a:t>2. Paper Khata Limitations</a:t>
+            </a:r>
+          </a:p>
+          <a:p>
+            <a:pPr>
+              <a:spcAft>
+                <a:spcPts val="500"/>
+              </a:spcAft>
+              <a:defRPr sz="1150">
+                <a:solidFill>
+                  <a:srgbClr val="0F172A"/>
+                </a:solidFill>
+                <a:latin typeface="Arial"/>
+              </a:defRPr>
+            </a:pPr>
+            <a:r>
+              <a:t>•  Handwritten arithmetic errors during daily ledger tallying.</a:t>
+            </a:r>
+          </a:p>
+          <a:p>
+            <a:pPr>
+              <a:spcAft>
+                <a:spcPts val="500"/>
+              </a:spcAft>
+              <a:defRPr sz="1150">
+                <a:solidFill>
+                  <a:srgbClr val="0F172A"/>
+                </a:solidFill>
+                <a:latin typeface="Arial"/>
+              </a:defRPr>
+            </a:pPr>
+            <a:r>
+              <a:t>•  Physical register damage, torn pages, or ink fading.</a:t>
+            </a:r>
+          </a:p>
+          <a:p>
+            <a:pPr>
+              <a:spcAft>
+                <a:spcPts val="500"/>
+              </a:spcAft>
+              <a:defRPr sz="1150">
+                <a:solidFill>
+                  <a:srgbClr val="0F172A"/>
+                </a:solidFill>
+                <a:latin typeface="Arial"/>
+              </a:defRPr>
+            </a:pPr>
+            <a:r>
+              <a:t>•  Frequent arguments with customers over old unverified dues.</a:t>
+            </a:r>
+          </a:p>
+          <a:p>
+            <a:pPr>
+              <a:spcAft>
+                <a:spcPts val="500"/>
+              </a:spcAft>
+              <a:defRPr sz="1150">
+                <a:solidFill>
+                  <a:srgbClr val="0F172A"/>
+                </a:solidFill>
+                <a:latin typeface="Arial"/>
+              </a:defRPr>
+            </a:pPr>
+            <a:r>
+              <a:t>•  No payment proof or timestamp audit trail.</a:t>
             </a:r>
           </a:p>
         </p:txBody>
@@ -6929,9 +6897,9 @@
           <a:p>
             <a:pPr>
               <a:spcAft>
-                <a:spcPts val="1000"/>
-              </a:spcAft>
-              <a:defRPr sz="1500" b="1">
+                <a:spcPts val="800"/>
+              </a:spcAft>
+              <a:defRPr sz="1450" b="1">
                 <a:solidFill>
                   <a:srgbClr val="16A34A"/>
                 </a:solidFill>
@@ -6939,71 +6907,71 @@
               </a:defRPr>
             </a:pPr>
             <a:r>
-              <a:t>The SmartShop Solution</a:t>
-            </a:r>
-          </a:p>
-          <a:p>
-            <a:pPr>
-              <a:spcAft>
-                <a:spcPts val="600"/>
-              </a:spcAft>
-              <a:defRPr sz="1200">
-                <a:solidFill>
-                  <a:srgbClr val="0F172A"/>
-                </a:solidFill>
-                <a:latin typeface="Arial"/>
-              </a:defRPr>
-            </a:pPr>
-            <a:r>
-              <a:t>•  Unified POS + Digital Khata in a single web application.</a:t>
-            </a:r>
-          </a:p>
-          <a:p>
-            <a:pPr>
-              <a:spcAft>
-                <a:spcPts val="600"/>
-              </a:spcAft>
-              <a:defRPr sz="1200">
-                <a:solidFill>
-                  <a:srgbClr val="0F172A"/>
-                </a:solidFill>
-                <a:latin typeface="Arial"/>
-              </a:defRPr>
-            </a:pPr>
-            <a:r>
-              <a:t>•  Accessible on any laptop, tablet, or smartphone.</a:t>
-            </a:r>
-          </a:p>
-          <a:p>
-            <a:pPr>
-              <a:spcAft>
-                <a:spcPts val="600"/>
-              </a:spcAft>
-              <a:defRPr sz="1200">
-                <a:solidFill>
-                  <a:srgbClr val="0F172A"/>
-                </a:solidFill>
-                <a:latin typeface="Arial"/>
-              </a:defRPr>
-            </a:pPr>
-            <a:r>
-              <a:t>•  ACID-compliant transactional rollbacks for zero discrepancies.</a:t>
-            </a:r>
-          </a:p>
-          <a:p>
-            <a:pPr>
-              <a:spcAft>
-                <a:spcPts val="600"/>
-              </a:spcAft>
-              <a:defRPr sz="1200">
-                <a:solidFill>
-                  <a:srgbClr val="0F172A"/>
-                </a:solidFill>
-                <a:latin typeface="Arial"/>
-              </a:defRPr>
-            </a:pPr>
-            <a:r>
-              <a:t>•  Zero hardware lock-in and seamless cloud synchronization.</a:t>
+              <a:t>3. The SmartShop Solution</a:t>
+            </a:r>
+          </a:p>
+          <a:p>
+            <a:pPr>
+              <a:spcAft>
+                <a:spcPts val="500"/>
+              </a:spcAft>
+              <a:defRPr sz="1150">
+                <a:solidFill>
+                  <a:srgbClr val="0F172A"/>
+                </a:solidFill>
+                <a:latin typeface="Arial"/>
+              </a:defRPr>
+            </a:pPr>
+            <a:r>
+              <a:t>•  Live Catalog &amp; Stock check from home on mobile/PC.</a:t>
+            </a:r>
+          </a:p>
+          <a:p>
+            <a:pPr>
+              <a:spcAft>
+                <a:spcPts val="500"/>
+              </a:spcAft>
+              <a:defRPr sz="1150">
+                <a:solidFill>
+                  <a:srgbClr val="0F172A"/>
+                </a:solidFill>
+                <a:latin typeface="Arial"/>
+              </a:defRPr>
+            </a:pPr>
+            <a:r>
+              <a:t>•  Fast POS counter billing with multi-payment modes.</a:t>
+            </a:r>
+          </a:p>
+          <a:p>
+            <a:pPr>
+              <a:spcAft>
+                <a:spcPts val="500"/>
+              </a:spcAft>
+              <a:defRPr sz="1150">
+                <a:solidFill>
+                  <a:srgbClr val="0F172A"/>
+                </a:solidFill>
+                <a:latin typeface="Arial"/>
+              </a:defRPr>
+            </a:pPr>
+            <a:r>
+              <a:t>•  Automated digital ledger with borrow limits and due dates.</a:t>
+            </a:r>
+          </a:p>
+          <a:p>
+            <a:pPr>
+              <a:spcAft>
+                <a:spcPts val="500"/>
+              </a:spcAft>
+              <a:defRPr sz="1150">
+                <a:solidFill>
+                  <a:srgbClr val="0F172A"/>
+                </a:solidFill>
+                <a:latin typeface="Arial"/>
+              </a:defRPr>
+            </a:pPr>
+            <a:r>
+              <a:t>•  Admin payment verification queue with screenshot proofs.</a:t>
             </a:r>
           </a:p>
         </p:txBody>
@@ -7049,7 +7017,7 @@
           <a:lstStyle/>
           <a:p>
             <a:pPr>
-              <a:defRPr sz="1100" b="1">
+              <a:defRPr sz="1050" b="1">
                 <a:solidFill>
                   <a:srgbClr val="0284C7"/>
                 </a:solidFill>
@@ -7057,12 +7025,12 @@
               </a:defRPr>
             </a:pPr>
             <a:r>
-              <a:t>MAJOR PROJECT PRESENTATION</a:t>
-            </a:r>
-          </a:p>
-          <a:p>
-            <a:pPr>
-              <a:defRPr sz="2400" b="1">
+              <a:t>MCA 3RD SEMESTER MINI PROJECT PRESENTATION</a:t>
+            </a:r>
+          </a:p>
+          <a:p>
+            <a:pPr>
+              <a:defRPr sz="2300" b="1">
                 <a:solidFill>
                   <a:srgbClr val="1E3A8A"/>
                 </a:solidFill>
@@ -7189,9 +7157,9 @@
           <a:p>
             <a:pPr>
               <a:spcAft>
-                <a:spcPts val="1000"/>
-              </a:spcAft>
-              <a:defRPr sz="1500" b="1">
+                <a:spcPts val="800"/>
+              </a:spcAft>
+              <a:defRPr sz="1450" b="1">
                 <a:solidFill>
                   <a:srgbClr val="1E3A8A"/>
                 </a:solidFill>
@@ -7199,87 +7167,87 @@
               </a:defRPr>
             </a:pPr>
             <a:r>
-              <a:t>Key Functional Objectives</a:t>
-            </a:r>
-          </a:p>
-          <a:p>
-            <a:pPr>
-              <a:spcAft>
-                <a:spcPts val="600"/>
-              </a:spcAft>
-              <a:defRPr sz="1200">
-                <a:solidFill>
-                  <a:srgbClr val="0F172A"/>
-                </a:solidFill>
-                <a:latin typeface="Arial"/>
-              </a:defRPr>
-            </a:pPr>
-            <a:r>
-              <a:t>•  Fast Multi-Mode Billing: Enable counter staff to bill items in under 30 seconds via Cash, UPI, Credit, or Partial splits.</a:t>
-            </a:r>
-          </a:p>
-          <a:p>
-            <a:pPr>
-              <a:spcAft>
-                <a:spcPts val="600"/>
-              </a:spcAft>
-              <a:defRPr sz="1200">
-                <a:solidFill>
-                  <a:srgbClr val="0F172A"/>
-                </a:solidFill>
-                <a:latin typeface="Arial"/>
-              </a:defRPr>
-            </a:pPr>
-            <a:r>
-              <a:t>•  Credit Ceiling Enforcement: Validate customer borrow limits before issuing new credit to prevent bad debts.</a:t>
-            </a:r>
-          </a:p>
-          <a:p>
-            <a:pPr>
-              <a:spcAft>
-                <a:spcPts val="600"/>
-              </a:spcAft>
-              <a:defRPr sz="1200">
-                <a:solidFill>
-                  <a:srgbClr val="0F172A"/>
-                </a:solidFill>
-                <a:latin typeface="Arial"/>
-              </a:defRPr>
-            </a:pPr>
-            <a:r>
-              <a:t>•  Full &amp; Partial Returns: Automatically restock items and deduct customer dues atomically upon product return.</a:t>
-            </a:r>
-          </a:p>
-          <a:p>
-            <a:pPr>
-              <a:spcAft>
-                <a:spcPts val="600"/>
-              </a:spcAft>
-              <a:defRPr sz="1200">
-                <a:solidFill>
-                  <a:srgbClr val="0F172A"/>
-                </a:solidFill>
-                <a:latin typeface="Arial"/>
-              </a:defRPr>
-            </a:pPr>
-            <a:r>
-              <a:t>•  Payment Claims Reconciliation: Provide admin verification dashboard for customer-submitted Cash &amp; UPI proofs.</a:t>
-            </a:r>
-          </a:p>
-          <a:p>
-            <a:pPr>
-              <a:spcAft>
-                <a:spcPts val="600"/>
-              </a:spcAft>
-              <a:defRPr sz="1200">
-                <a:solidFill>
-                  <a:srgbClr val="0F172A"/>
-                </a:solidFill>
-                <a:latin typeface="Arial"/>
-              </a:defRPr>
-            </a:pPr>
-            <a:r>
-              <a:t>•  Audit Logging: Track admin actions (product updates, price changes, sales, and approvals) for accountability.</a:t>
+              <a:t>Primary Functional Objectives</a:t>
+            </a:r>
+          </a:p>
+          <a:p>
+            <a:pPr>
+              <a:spcAft>
+                <a:spcPts val="500"/>
+              </a:spcAft>
+              <a:defRPr sz="1150">
+                <a:solidFill>
+                  <a:srgbClr val="0F172A"/>
+                </a:solidFill>
+                <a:latin typeface="Arial"/>
+              </a:defRPr>
+            </a:pPr>
+            <a:r>
+              <a:t>•  Live Product Catalog: Allow customers to browse inventory and verify stock availability from home.</a:t>
+            </a:r>
+          </a:p>
+          <a:p>
+            <a:pPr>
+              <a:spcAft>
+                <a:spcPts val="500"/>
+              </a:spcAft>
+              <a:defRPr sz="1150">
+                <a:solidFill>
+                  <a:srgbClr val="0F172A"/>
+                </a:solidFill>
+                <a:latin typeface="Arial"/>
+              </a:defRPr>
+            </a:pPr>
+            <a:r>
+              <a:t>•  Fast POS Counter Billing: Enable shopkeepers to create bills in seconds via Cash, UPI, Credit, or Partial splits.</a:t>
+            </a:r>
+          </a:p>
+          <a:p>
+            <a:pPr>
+              <a:spcAft>
+                <a:spcPts val="500"/>
+              </a:spcAft>
+              <a:defRPr sz="1150">
+                <a:solidFill>
+                  <a:srgbClr val="0F172A"/>
+                </a:solidFill>
+                <a:latin typeface="Arial"/>
+              </a:defRPr>
+            </a:pPr>
+            <a:r>
+              <a:t>•  Digital Credit Ledger ('Khata'): Maintain customer debt balances, repayment due dates, and borrow limits.</a:t>
+            </a:r>
+          </a:p>
+          <a:p>
+            <a:pPr>
+              <a:spcAft>
+                <a:spcPts val="500"/>
+              </a:spcAft>
+              <a:defRPr sz="1150">
+                <a:solidFill>
+                  <a:srgbClr val="0F172A"/>
+                </a:solidFill>
+                <a:latin typeface="Arial"/>
+              </a:defRPr>
+            </a:pPr>
+            <a:r>
+              <a:t>•  Payment Claims Verification: Admin dashboard to review and approve customer Cash/UPI payment proofs.</a:t>
+            </a:r>
+          </a:p>
+          <a:p>
+            <a:pPr>
+              <a:spcAft>
+                <a:spcPts val="500"/>
+              </a:spcAft>
+              <a:defRPr sz="1150">
+                <a:solidFill>
+                  <a:srgbClr val="0F172A"/>
+                </a:solidFill>
+                <a:latin typeface="Arial"/>
+              </a:defRPr>
+            </a:pPr>
+            <a:r>
+              <a:t>•  Product Returns Management: Restock returned items and deduct customer debt atomically.</a:t>
             </a:r>
           </a:p>
         </p:txBody>
@@ -7353,9 +7321,9 @@
           <a:p>
             <a:pPr>
               <a:spcAft>
-                <a:spcPts val="1000"/>
-              </a:spcAft>
-              <a:defRPr sz="1500" b="1">
+                <a:spcPts val="800"/>
+              </a:spcAft>
+              <a:defRPr sz="1450" b="1">
                 <a:solidFill>
                   <a:srgbClr val="1E3A8A"/>
                 </a:solidFill>
@@ -7363,87 +7331,87 @@
               </a:defRPr>
             </a:pPr>
             <a:r>
-              <a:t>Non-Functional &amp; Technical Goals</a:t>
-            </a:r>
-          </a:p>
-          <a:p>
-            <a:pPr>
-              <a:spcAft>
-                <a:spcPts val="600"/>
-              </a:spcAft>
-              <a:defRPr sz="1200">
-                <a:solidFill>
-                  <a:srgbClr val="0F172A"/>
-                </a:solidFill>
-                <a:latin typeface="Arial"/>
-              </a:defRPr>
-            </a:pPr>
-            <a:r>
-              <a:t>•  ACID Atomicity: Multi-document operations wrapped in MongoDB transactions to prevent dirty writes.</a:t>
-            </a:r>
-          </a:p>
-          <a:p>
-            <a:pPr>
-              <a:spcAft>
-                <a:spcPts val="600"/>
-              </a:spcAft>
-              <a:defRPr sz="1200">
-                <a:solidFill>
-                  <a:srgbClr val="0F172A"/>
-                </a:solidFill>
-                <a:latin typeface="Arial"/>
-              </a:defRPr>
-            </a:pPr>
-            <a:r>
-              <a:t>•  High Responsiveness: Modern glassmorphism UI optimized for Mobile, Tablet, and Desktop screens.</a:t>
-            </a:r>
-          </a:p>
-          <a:p>
-            <a:pPr>
-              <a:spcAft>
-                <a:spcPts val="600"/>
-              </a:spcAft>
-              <a:defRPr sz="1200">
-                <a:solidFill>
-                  <a:srgbClr val="0F172A"/>
-                </a:solidFill>
-                <a:latin typeface="Arial"/>
-              </a:defRPr>
-            </a:pPr>
-            <a:r>
-              <a:t>•  Robust Security: Stateless JWT authentication, role-based access control (RBAC), and security headers.</a:t>
-            </a:r>
-          </a:p>
-          <a:p>
-            <a:pPr>
-              <a:spcAft>
-                <a:spcPts val="600"/>
-              </a:spcAft>
-              <a:defRPr sz="1200">
-                <a:solidFill>
-                  <a:srgbClr val="0F172A"/>
-                </a:solidFill>
-                <a:latin typeface="Arial"/>
-              </a:defRPr>
-            </a:pPr>
-            <a:r>
-              <a:t>•  Zero-Config Media Storage: Cloudinary integration for scalable product and payment proof storage.</a:t>
-            </a:r>
-          </a:p>
-          <a:p>
-            <a:pPr>
-              <a:spcAft>
-                <a:spcPts val="600"/>
-              </a:spcAft>
-              <a:defRPr sz="1200">
-                <a:solidFill>
-                  <a:srgbClr val="0F172A"/>
-                </a:solidFill>
-                <a:latin typeface="Arial"/>
-              </a:defRPr>
-            </a:pPr>
-            <a:r>
-              <a:t>•  Scalable MERN Architecture: Clean Separation of Concerns with RESTful endpoints and modular React structure.</a:t>
+              <a:t>Technical &amp; Non-Functional Scope</a:t>
+            </a:r>
+          </a:p>
+          <a:p>
+            <a:pPr>
+              <a:spcAft>
+                <a:spcPts val="500"/>
+              </a:spcAft>
+              <a:defRPr sz="1150">
+                <a:solidFill>
+                  <a:srgbClr val="0F172A"/>
+                </a:solidFill>
+                <a:latin typeface="Arial"/>
+              </a:defRPr>
+            </a:pPr>
+            <a:r>
+              <a:t>•  MERN Architecture: Modular React 19 frontend and asynchronous Node.js / Express.js REST backend.</a:t>
+            </a:r>
+          </a:p>
+          <a:p>
+            <a:pPr>
+              <a:spcAft>
+                <a:spcPts val="500"/>
+              </a:spcAft>
+              <a:defRPr sz="1150">
+                <a:solidFill>
+                  <a:srgbClr val="0F172A"/>
+                </a:solidFill>
+                <a:latin typeface="Arial"/>
+              </a:defRPr>
+            </a:pPr>
+            <a:r>
+              <a:t>•  ACID Reliability: Multi-document write operations protected with MongoDB transaction rollbacks.</a:t>
+            </a:r>
+          </a:p>
+          <a:p>
+            <a:pPr>
+              <a:spcAft>
+                <a:spcPts val="500"/>
+              </a:spcAft>
+              <a:defRPr sz="1150">
+                <a:solidFill>
+                  <a:srgbClr val="0F172A"/>
+                </a:solidFill>
+                <a:latin typeface="Arial"/>
+              </a:defRPr>
+            </a:pPr>
+            <a:r>
+              <a:t>•  Cloud Storage: Cloudinary CDN integration for product images and receipt screenshot storage.</a:t>
+            </a:r>
+          </a:p>
+          <a:p>
+            <a:pPr>
+              <a:spcAft>
+                <a:spcPts val="500"/>
+              </a:spcAft>
+              <a:defRPr sz="1150">
+                <a:solidFill>
+                  <a:srgbClr val="0F172A"/>
+                </a:solidFill>
+                <a:latin typeface="Arial"/>
+              </a:defRPr>
+            </a:pPr>
+            <a:r>
+              <a:t>•  Online Gateway: Razorpay API integration for instant online credit clearance.</a:t>
+            </a:r>
+          </a:p>
+          <a:p>
+            <a:pPr>
+              <a:spcAft>
+                <a:spcPts val="500"/>
+              </a:spcAft>
+              <a:defRPr sz="1150">
+                <a:solidFill>
+                  <a:srgbClr val="0F172A"/>
+                </a:solidFill>
+                <a:latin typeface="Arial"/>
+              </a:defRPr>
+            </a:pPr>
+            <a:r>
+              <a:t>•  Responsive Layout: Tailored glassmorphism UI for Mobile, Tablet, and Desktop screens.</a:t>
             </a:r>
           </a:p>
         </p:txBody>
@@ -7489,7 +7457,7 @@
           <a:lstStyle/>
           <a:p>
             <a:pPr>
-              <a:defRPr sz="1100" b="1">
+              <a:defRPr sz="1050" b="1">
                 <a:solidFill>
                   <a:srgbClr val="0284C7"/>
                 </a:solidFill>
@@ -7497,12 +7465,12 @@
               </a:defRPr>
             </a:pPr>
             <a:r>
-              <a:t>MAJOR PROJECT PRESENTATION</a:t>
-            </a:r>
-          </a:p>
-          <a:p>
-            <a:pPr>
-              <a:defRPr sz="2400" b="1">
+              <a:t>MCA 3RD SEMESTER MINI PROJECT PRESENTATION</a:t>
+            </a:r>
+          </a:p>
+          <a:p>
+            <a:pPr>
+              <a:defRPr sz="2300" b="1">
                 <a:solidFill>
                   <a:srgbClr val="1E3A8A"/>
                 </a:solidFill>
@@ -7629,9 +7597,9 @@
           <a:p>
             <a:pPr>
               <a:spcAft>
-                <a:spcPts val="1000"/>
-              </a:spcAft>
-              <a:defRPr sz="1500" b="1">
+                <a:spcPts val="800"/>
+              </a:spcAft>
+              <a:defRPr sz="1450" b="1">
                 <a:solidFill>
                   <a:srgbClr val="1E3A8A"/>
                 </a:solidFill>
@@ -7645,9 +7613,9 @@
           <a:p>
             <a:pPr>
               <a:spcAft>
-                <a:spcPts val="600"/>
-              </a:spcAft>
-              <a:defRPr sz="1200">
+                <a:spcPts val="500"/>
+              </a:spcAft>
+              <a:defRPr sz="1150">
                 <a:solidFill>
                   <a:srgbClr val="0F172A"/>
                 </a:solidFill>
@@ -7661,25 +7629,25 @@
           <a:p>
             <a:pPr>
               <a:spcAft>
-                <a:spcPts val="600"/>
-              </a:spcAft>
-              <a:defRPr sz="1200">
-                <a:solidFill>
-                  <a:srgbClr val="0F172A"/>
-                </a:solidFill>
-                <a:latin typeface="Arial"/>
-              </a:defRPr>
-            </a:pPr>
-            <a:r>
-              <a:t>•  Vite (Lightning Fast Build)</a:t>
-            </a:r>
-          </a:p>
-          <a:p>
-            <a:pPr>
-              <a:spcAft>
-                <a:spcPts val="600"/>
-              </a:spcAft>
-              <a:defRPr sz="1200">
+                <a:spcPts val="500"/>
+              </a:spcAft>
+              <a:defRPr sz="1150">
+                <a:solidFill>
+                  <a:srgbClr val="0F172A"/>
+                </a:solidFill>
+                <a:latin typeface="Arial"/>
+              </a:defRPr>
+            </a:pPr>
+            <a:r>
+              <a:t>•  Vite (Build Tool)</a:t>
+            </a:r>
+          </a:p>
+          <a:p>
+            <a:pPr>
+              <a:spcAft>
+                <a:spcPts val="500"/>
+              </a:spcAft>
+              <a:defRPr sz="1150">
                 <a:solidFill>
                   <a:srgbClr val="0F172A"/>
                 </a:solidFill>
@@ -7693,9 +7661,9 @@
           <a:p>
             <a:pPr>
               <a:spcAft>
-                <a:spcPts val="600"/>
-              </a:spcAft>
-              <a:defRPr sz="1200">
+                <a:spcPts val="500"/>
+              </a:spcAft>
+              <a:defRPr sz="1150">
                 <a:solidFill>
                   <a:srgbClr val="0F172A"/>
                 </a:solidFill>
@@ -7709,17 +7677,17 @@
           <a:p>
             <a:pPr>
               <a:spcAft>
-                <a:spcPts val="600"/>
-              </a:spcAft>
-              <a:defRPr sz="1200">
-                <a:solidFill>
-                  <a:srgbClr val="0F172A"/>
-                </a:solidFill>
-                <a:latin typeface="Arial"/>
-              </a:defRPr>
-            </a:pPr>
-            <a:r>
-              <a:t>•  Glassmorphism Design</a:t>
+                <a:spcPts val="500"/>
+              </a:spcAft>
+              <a:defRPr sz="1150">
+                <a:solidFill>
+                  <a:srgbClr val="0F172A"/>
+                </a:solidFill>
+                <a:latin typeface="Arial"/>
+              </a:defRPr>
+            </a:pPr>
+            <a:r>
+              <a:t>•  Responsive Glass UI</a:t>
             </a:r>
           </a:p>
         </p:txBody>
@@ -7793,9 +7761,9 @@
           <a:p>
             <a:pPr>
               <a:spcAft>
-                <a:spcPts val="1000"/>
-              </a:spcAft>
-              <a:defRPr sz="1500" b="1">
+                <a:spcPts val="800"/>
+              </a:spcAft>
+              <a:defRPr sz="1450" b="1">
                 <a:solidFill>
                   <a:srgbClr val="1E3A8A"/>
                 </a:solidFill>
@@ -7809,9 +7777,9 @@
           <a:p>
             <a:pPr>
               <a:spcAft>
-                <a:spcPts val="600"/>
-              </a:spcAft>
-              <a:defRPr sz="1200">
+                <a:spcPts val="500"/>
+              </a:spcAft>
+              <a:defRPr sz="1150">
                 <a:solidFill>
                   <a:srgbClr val="0F172A"/>
                 </a:solidFill>
@@ -7825,25 +7793,25 @@
           <a:p>
             <a:pPr>
               <a:spcAft>
-                <a:spcPts val="600"/>
-              </a:spcAft>
-              <a:defRPr sz="1200">
-                <a:solidFill>
-                  <a:srgbClr val="0F172A"/>
-                </a:solidFill>
-                <a:latin typeface="Arial"/>
-              </a:defRPr>
-            </a:pPr>
-            <a:r>
-              <a:t>•  Express.js (REST Framework)</a:t>
-            </a:r>
-          </a:p>
-          <a:p>
-            <a:pPr>
-              <a:spcAft>
-                <a:spcPts val="600"/>
-              </a:spcAft>
-              <a:defRPr sz="1200">
+                <a:spcPts val="500"/>
+              </a:spcAft>
+              <a:defRPr sz="1150">
+                <a:solidFill>
+                  <a:srgbClr val="0F172A"/>
+                </a:solidFill>
+                <a:latin typeface="Arial"/>
+              </a:defRPr>
+            </a:pPr>
+            <a:r>
+              <a:t>•  Express.js (REST API)</a:t>
+            </a:r>
+          </a:p>
+          <a:p>
+            <a:pPr>
+              <a:spcAft>
+                <a:spcPts val="500"/>
+              </a:spcAft>
+              <a:defRPr sz="1150">
                 <a:solidFill>
                   <a:srgbClr val="0F172A"/>
                 </a:solidFill>
@@ -7857,33 +7825,33 @@
           <a:p>
             <a:pPr>
               <a:spcAft>
-                <a:spcPts val="600"/>
-              </a:spcAft>
-              <a:defRPr sz="1200">
-                <a:solidFill>
-                  <a:srgbClr val="0F172A"/>
-                </a:solidFill>
-                <a:latin typeface="Arial"/>
-              </a:defRPr>
-            </a:pPr>
-            <a:r>
-              <a:t>•  Multer (File Uploads)</a:t>
-            </a:r>
-          </a:p>
-          <a:p>
-            <a:pPr>
-              <a:spcAft>
-                <a:spcPts val="600"/>
-              </a:spcAft>
-              <a:defRPr sz="1200">
-                <a:solidFill>
-                  <a:srgbClr val="0F172A"/>
-                </a:solidFill>
-                <a:latin typeface="Arial"/>
-              </a:defRPr>
-            </a:pPr>
-            <a:r>
-              <a:t>•  Security Response Headers</a:t>
+                <a:spcPts val="500"/>
+              </a:spcAft>
+              <a:defRPr sz="1150">
+                <a:solidFill>
+                  <a:srgbClr val="0F172A"/>
+                </a:solidFill>
+                <a:latin typeface="Arial"/>
+              </a:defRPr>
+            </a:pPr>
+            <a:r>
+              <a:t>•  Multer (Uploads)</a:t>
+            </a:r>
+          </a:p>
+          <a:p>
+            <a:pPr>
+              <a:spcAft>
+                <a:spcPts val="500"/>
+              </a:spcAft>
+              <a:defRPr sz="1150">
+                <a:solidFill>
+                  <a:srgbClr val="0F172A"/>
+                </a:solidFill>
+                <a:latin typeface="Arial"/>
+              </a:defRPr>
+            </a:pPr>
+            <a:r>
+              <a:t>•  Security Middleware</a:t>
             </a:r>
           </a:p>
         </p:txBody>
@@ -7957,9 +7925,9 @@
           <a:p>
             <a:pPr>
               <a:spcAft>
-                <a:spcPts val="1000"/>
-              </a:spcAft>
-              <a:defRPr sz="1500" b="1">
+                <a:spcPts val="800"/>
+              </a:spcAft>
+              <a:defRPr sz="1450" b="1">
                 <a:solidFill>
                   <a:srgbClr val="1E3A8A"/>
                 </a:solidFill>
@@ -7973,73 +7941,73 @@
           <a:p>
             <a:pPr>
               <a:spcAft>
-                <a:spcPts val="600"/>
-              </a:spcAft>
-              <a:defRPr sz="1200">
-                <a:solidFill>
-                  <a:srgbClr val="0F172A"/>
-                </a:solidFill>
-                <a:latin typeface="Arial"/>
-              </a:defRPr>
-            </a:pPr>
-            <a:r>
-              <a:t>•  MongoDB (NoSQL Document)</a:t>
-            </a:r>
-          </a:p>
-          <a:p>
-            <a:pPr>
-              <a:spcAft>
-                <a:spcPts val="600"/>
-              </a:spcAft>
-              <a:defRPr sz="1200">
-                <a:solidFill>
-                  <a:srgbClr val="0F172A"/>
-                </a:solidFill>
-                <a:latin typeface="Arial"/>
-              </a:defRPr>
-            </a:pPr>
-            <a:r>
-              <a:t>•  Mongoose ORM (Models)</a:t>
-            </a:r>
-          </a:p>
-          <a:p>
-            <a:pPr>
-              <a:spcAft>
-                <a:spcPts val="600"/>
-              </a:spcAft>
-              <a:defRPr sz="1200">
-                <a:solidFill>
-                  <a:srgbClr val="0F172A"/>
-                </a:solidFill>
-                <a:latin typeface="Arial"/>
-              </a:defRPr>
-            </a:pPr>
-            <a:r>
-              <a:t>•  Cloudinary (CDN Media)</a:t>
-            </a:r>
-          </a:p>
-          <a:p>
-            <a:pPr>
-              <a:spcAft>
-                <a:spcPts val="600"/>
-              </a:spcAft>
-              <a:defRPr sz="1200">
-                <a:solidFill>
-                  <a:srgbClr val="0F172A"/>
-                </a:solidFill>
-                <a:latin typeface="Arial"/>
-              </a:defRPr>
-            </a:pPr>
-            <a:r>
-              <a:t>•  Multi-Doc Transactions</a:t>
-            </a:r>
-          </a:p>
-          <a:p>
-            <a:pPr>
-              <a:spcAft>
-                <a:spcPts val="600"/>
-              </a:spcAft>
-              <a:defRPr sz="1200">
+                <a:spcPts val="500"/>
+              </a:spcAft>
+              <a:defRPr sz="1150">
+                <a:solidFill>
+                  <a:srgbClr val="0F172A"/>
+                </a:solidFill>
+                <a:latin typeface="Arial"/>
+              </a:defRPr>
+            </a:pPr>
+            <a:r>
+              <a:t>•  MongoDB (Document DB)</a:t>
+            </a:r>
+          </a:p>
+          <a:p>
+            <a:pPr>
+              <a:spcAft>
+                <a:spcPts val="500"/>
+              </a:spcAft>
+              <a:defRPr sz="1150">
+                <a:solidFill>
+                  <a:srgbClr val="0F172A"/>
+                </a:solidFill>
+                <a:latin typeface="Arial"/>
+              </a:defRPr>
+            </a:pPr>
+            <a:r>
+              <a:t>•  Mongoose (ORM)</a:t>
+            </a:r>
+          </a:p>
+          <a:p>
+            <a:pPr>
+              <a:spcAft>
+                <a:spcPts val="500"/>
+              </a:spcAft>
+              <a:defRPr sz="1150">
+                <a:solidFill>
+                  <a:srgbClr val="0F172A"/>
+                </a:solidFill>
+                <a:latin typeface="Arial"/>
+              </a:defRPr>
+            </a:pPr>
+            <a:r>
+              <a:t>•  Cloudinary (Image CDN)</a:t>
+            </a:r>
+          </a:p>
+          <a:p>
+            <a:pPr>
+              <a:spcAft>
+                <a:spcPts val="500"/>
+              </a:spcAft>
+              <a:defRPr sz="1150">
+                <a:solidFill>
+                  <a:srgbClr val="0F172A"/>
+                </a:solidFill>
+                <a:latin typeface="Arial"/>
+              </a:defRPr>
+            </a:pPr>
+            <a:r>
+              <a:t>•  ACID Transactions</a:t>
+            </a:r>
+          </a:p>
+          <a:p>
+            <a:pPr>
+              <a:spcAft>
+                <a:spcPts val="500"/>
+              </a:spcAft>
+              <a:defRPr sz="1150">
                 <a:solidFill>
                   <a:srgbClr val="0F172A"/>
                 </a:solidFill>
@@ -8121,9 +8089,9 @@
           <a:p>
             <a:pPr>
               <a:spcAft>
-                <a:spcPts val="1000"/>
-              </a:spcAft>
-              <a:defRPr sz="1500" b="1">
+                <a:spcPts val="800"/>
+              </a:spcAft>
+              <a:defRPr sz="1450" b="1">
                 <a:solidFill>
                   <a:srgbClr val="1E3A8A"/>
                 </a:solidFill>
@@ -8131,47 +8099,47 @@
               </a:defRPr>
             </a:pPr>
             <a:r>
-              <a:t>Security &amp; Payments</a:t>
-            </a:r>
-          </a:p>
-          <a:p>
-            <a:pPr>
-              <a:spcAft>
-                <a:spcPts val="600"/>
-              </a:spcAft>
-              <a:defRPr sz="1200">
-                <a:solidFill>
-                  <a:srgbClr val="0F172A"/>
-                </a:solidFill>
-                <a:latin typeface="Arial"/>
-              </a:defRPr>
-            </a:pPr>
-            <a:r>
-              <a:t>•  JWT (Stateless Auth)</a:t>
-            </a:r>
-          </a:p>
-          <a:p>
-            <a:pPr>
-              <a:spcAft>
-                <a:spcPts val="600"/>
-              </a:spcAft>
-              <a:defRPr sz="1200">
-                <a:solidFill>
-                  <a:srgbClr val="0F172A"/>
-                </a:solidFill>
-                <a:latin typeface="Arial"/>
-              </a:defRPr>
-            </a:pPr>
-            <a:r>
-              <a:t>•  Bcrypt.js (Password Hash)</a:t>
-            </a:r>
-          </a:p>
-          <a:p>
-            <a:pPr>
-              <a:spcAft>
-                <a:spcPts val="600"/>
-              </a:spcAft>
-              <a:defRPr sz="1200">
+              <a:t>Auth &amp; Payments</a:t>
+            </a:r>
+          </a:p>
+          <a:p>
+            <a:pPr>
+              <a:spcAft>
+                <a:spcPts val="500"/>
+              </a:spcAft>
+              <a:defRPr sz="1150">
+                <a:solidFill>
+                  <a:srgbClr val="0F172A"/>
+                </a:solidFill>
+                <a:latin typeface="Arial"/>
+              </a:defRPr>
+            </a:pPr>
+            <a:r>
+              <a:t>•  JWT (Token Auth)</a:t>
+            </a:r>
+          </a:p>
+          <a:p>
+            <a:pPr>
+              <a:spcAft>
+                <a:spcPts val="500"/>
+              </a:spcAft>
+              <a:defRPr sz="1150">
+                <a:solidFill>
+                  <a:srgbClr val="0F172A"/>
+                </a:solidFill>
+                <a:latin typeface="Arial"/>
+              </a:defRPr>
+            </a:pPr>
+            <a:r>
+              <a:t>•  Bcrypt.js (Hashing)</a:t>
+            </a:r>
+          </a:p>
+          <a:p>
+            <a:pPr>
+              <a:spcAft>
+                <a:spcPts val="500"/>
+              </a:spcAft>
+              <a:defRPr sz="1150">
                 <a:solidFill>
                   <a:srgbClr val="0F172A"/>
                 </a:solidFill>
@@ -8185,33 +8153,33 @@
           <a:p>
             <a:pPr>
               <a:spcAft>
-                <a:spcPts val="600"/>
-              </a:spcAft>
-              <a:defRPr sz="1200">
-                <a:solidFill>
-                  <a:srgbClr val="0F172A"/>
-                </a:solidFill>
-                <a:latin typeface="Arial"/>
-              </a:defRPr>
-            </a:pPr>
-            <a:r>
-              <a:t>•  Razorpay Gateway API</a:t>
-            </a:r>
-          </a:p>
-          <a:p>
-            <a:pPr>
-              <a:spcAft>
-                <a:spcPts val="600"/>
-              </a:spcAft>
-              <a:defRPr sz="1200">
-                <a:solidFill>
-                  <a:srgbClr val="0F172A"/>
-                </a:solidFill>
-                <a:latin typeface="Arial"/>
-              </a:defRPr>
-            </a:pPr>
-            <a:r>
-              <a:t>•  RBAC Role Protection</a:t>
+                <a:spcPts val="500"/>
+              </a:spcAft>
+              <a:defRPr sz="1150">
+                <a:solidFill>
+                  <a:srgbClr val="0F172A"/>
+                </a:solidFill>
+                <a:latin typeface="Arial"/>
+              </a:defRPr>
+            </a:pPr>
+            <a:r>
+              <a:t>•  Razorpay Payment API</a:t>
+            </a:r>
+          </a:p>
+          <a:p>
+            <a:pPr>
+              <a:spcAft>
+                <a:spcPts val="500"/>
+              </a:spcAft>
+              <a:defRPr sz="1150">
+                <a:solidFill>
+                  <a:srgbClr val="0F172A"/>
+                </a:solidFill>
+                <a:latin typeface="Arial"/>
+              </a:defRPr>
+            </a:pPr>
+            <a:r>
+              <a:t>•  RBAC Role Middleware</a:t>
             </a:r>
           </a:p>
         </p:txBody>
@@ -8257,7 +8225,7 @@
           <a:lstStyle/>
           <a:p>
             <a:pPr>
-              <a:defRPr sz="1100" b="1">
+              <a:defRPr sz="1050" b="1">
                 <a:solidFill>
                   <a:srgbClr val="0284C7"/>
                 </a:solidFill>
@@ -8265,12 +8233,12 @@
               </a:defRPr>
             </a:pPr>
             <a:r>
-              <a:t>MAJOR PROJECT PRESENTATION</a:t>
-            </a:r>
-          </a:p>
-          <a:p>
-            <a:pPr>
-              <a:defRPr sz="2400" b="1">
+              <a:t>MCA 3RD SEMESTER MINI PROJECT PRESENTATION</a:t>
+            </a:r>
+          </a:p>
+          <a:p>
+            <a:pPr>
+              <a:defRPr sz="2300" b="1">
                 <a:solidFill>
                   <a:srgbClr val="1E3A8A"/>
                 </a:solidFill>
@@ -8278,7 +8246,7 @@
               </a:defRPr>
             </a:pPr>
             <a:r>
-              <a:t>System Architecture &amp; Tiered Structure</a:t>
+              <a:t>3-Tier System Architecture</a:t>
             </a:r>
           </a:p>
         </p:txBody>
@@ -8397,9 +8365,9 @@
           <a:p>
             <a:pPr>
               <a:spcAft>
-                <a:spcPts val="1000"/>
-              </a:spcAft>
-              <a:defRPr sz="1500" b="1">
+                <a:spcPts val="800"/>
+              </a:spcAft>
+              <a:defRPr sz="1450" b="1">
                 <a:solidFill>
                   <a:srgbClr val="1E3A8A"/>
                 </a:solidFill>
@@ -8407,55 +8375,55 @@
               </a:defRPr>
             </a:pPr>
             <a:r>
-              <a:t>Presentation Tier (Client)</a:t>
-            </a:r>
-          </a:p>
-          <a:p>
-            <a:pPr>
-              <a:spcAft>
-                <a:spcPts val="600"/>
-              </a:spcAft>
-              <a:defRPr sz="1200">
-                <a:solidFill>
-                  <a:srgbClr val="0F172A"/>
-                </a:solidFill>
-                <a:latin typeface="Arial"/>
-              </a:defRPr>
-            </a:pPr>
-            <a:r>
-              <a:t>•  Customer Portal: Responsive dashboard for purchases, khata ledger balance, and payments.</a:t>
-            </a:r>
-          </a:p>
-          <a:p>
-            <a:pPr>
-              <a:spcAft>
-                <a:spcPts val="600"/>
-              </a:spcAft>
-              <a:defRPr sz="1200">
-                <a:solidFill>
-                  <a:srgbClr val="0F172A"/>
-                </a:solidFill>
-                <a:latin typeface="Arial"/>
-              </a:defRPr>
-            </a:pPr>
-            <a:r>
-              <a:t>•  Admin POS Portal: Point-of-sale billing, returns, customer profiles, activity feed, and inventory.</a:t>
-            </a:r>
-          </a:p>
-          <a:p>
-            <a:pPr>
-              <a:spcAft>
-                <a:spcPts val="600"/>
-              </a:spcAft>
-              <a:defRPr sz="1200">
-                <a:solidFill>
-                  <a:srgbClr val="0F172A"/>
-                </a:solidFill>
-                <a:latin typeface="Arial"/>
-              </a:defRPr>
-            </a:pPr>
-            <a:r>
-              <a:t>•  Universal Responsive Engine: Fully tailored for Mobile, Tablet, and Desktop displays.</a:t>
+              <a:t>1. Presentation Tier (Client)</a:t>
+            </a:r>
+          </a:p>
+          <a:p>
+            <a:pPr>
+              <a:spcAft>
+                <a:spcPts val="500"/>
+              </a:spcAft>
+              <a:defRPr sz="1150">
+                <a:solidFill>
+                  <a:srgbClr val="0F172A"/>
+                </a:solidFill>
+                <a:latin typeface="Arial"/>
+              </a:defRPr>
+            </a:pPr>
+            <a:r>
+              <a:t>•  Customer Portal: Browse stock from home, view bills, and submit payments.</a:t>
+            </a:r>
+          </a:p>
+          <a:p>
+            <a:pPr>
+              <a:spcAft>
+                <a:spcPts val="500"/>
+              </a:spcAft>
+              <a:defRPr sz="1150">
+                <a:solidFill>
+                  <a:srgbClr val="0F172A"/>
+                </a:solidFill>
+                <a:latin typeface="Arial"/>
+              </a:defRPr>
+            </a:pPr>
+            <a:r>
+              <a:t>•  Admin POS Portal: Point-of-sale billing, returns, customers, stock, and logs.</a:t>
+            </a:r>
+          </a:p>
+          <a:p>
+            <a:pPr>
+              <a:spcAft>
+                <a:spcPts val="500"/>
+              </a:spcAft>
+              <a:defRPr sz="1150">
+                <a:solidFill>
+                  <a:srgbClr val="0F172A"/>
+                </a:solidFill>
+                <a:latin typeface="Arial"/>
+              </a:defRPr>
+            </a:pPr>
+            <a:r>
+              <a:t>•  Universal Responsiveness: Adapts seamlessly to Mobile, Tablet, and Desktop screens.</a:t>
             </a:r>
           </a:p>
         </p:txBody>
@@ -8529,9 +8497,9 @@
           <a:p>
             <a:pPr>
               <a:spcAft>
-                <a:spcPts val="1000"/>
-              </a:spcAft>
-              <a:defRPr sz="1500" b="1">
+                <a:spcPts val="800"/>
+              </a:spcAft>
+              <a:defRPr sz="1450" b="1">
                 <a:solidFill>
                   <a:srgbClr val="1E3A8A"/>
                 </a:solidFill>
@@ -8539,55 +8507,55 @@
               </a:defRPr>
             </a:pPr>
             <a:r>
-              <a:t>Application Tier (Server)</a:t>
-            </a:r>
-          </a:p>
-          <a:p>
-            <a:pPr>
-              <a:spcAft>
-                <a:spcPts val="600"/>
-              </a:spcAft>
-              <a:defRPr sz="1200">
-                <a:solidFill>
-                  <a:srgbClr val="0F172A"/>
-                </a:solidFill>
-                <a:latin typeface="Arial"/>
-              </a:defRPr>
-            </a:pPr>
-            <a:r>
-              <a:t>•  RESTful API Routes: Organized by domain (/users, /products, /sales, /credits, /payments, /returns).</a:t>
-            </a:r>
-          </a:p>
-          <a:p>
-            <a:pPr>
-              <a:spcAft>
-                <a:spcPts val="600"/>
-              </a:spcAft>
-              <a:defRPr sz="1200">
-                <a:solidFill>
-                  <a:srgbClr val="0F172A"/>
-                </a:solidFill>
-                <a:latin typeface="Arial"/>
-              </a:defRPr>
-            </a:pPr>
-            <a:r>
-              <a:t>•  Auth &amp; Role Middleware: Protects endpoints via JWT and enforces customer/admin permissions.</a:t>
-            </a:r>
-          </a:p>
-          <a:p>
-            <a:pPr>
-              <a:spcAft>
-                <a:spcPts val="600"/>
-              </a:spcAft>
-              <a:defRPr sz="1200">
-                <a:solidFill>
-                  <a:srgbClr val="0F172A"/>
-                </a:solidFill>
-                <a:latin typeface="Arial"/>
-              </a:defRPr>
-            </a:pPr>
-            <a:r>
-              <a:t>•  Transaction Manager: Coordinates multi-document ACID write operations.</a:t>
+              <a:t>2. Application Tier (Server)</a:t>
+            </a:r>
+          </a:p>
+          <a:p>
+            <a:pPr>
+              <a:spcAft>
+                <a:spcPts val="500"/>
+              </a:spcAft>
+              <a:defRPr sz="1150">
+                <a:solidFill>
+                  <a:srgbClr val="0F172A"/>
+                </a:solidFill>
+                <a:latin typeface="Arial"/>
+              </a:defRPr>
+            </a:pPr>
+            <a:r>
+              <a:t>•  REST API Routes: /users, /products, /sales, /credits, /payments, /returns.</a:t>
+            </a:r>
+          </a:p>
+          <a:p>
+            <a:pPr>
+              <a:spcAft>
+                <a:spcPts val="500"/>
+              </a:spcAft>
+              <a:defRPr sz="1150">
+                <a:solidFill>
+                  <a:srgbClr val="0F172A"/>
+                </a:solidFill>
+                <a:latin typeface="Arial"/>
+              </a:defRPr>
+            </a:pPr>
+            <a:r>
+              <a:t>•  Auth &amp; Role Middleware: Validates JWT tokens and enforces permissions.</a:t>
+            </a:r>
+          </a:p>
+          <a:p>
+            <a:pPr>
+              <a:spcAft>
+                <a:spcPts val="500"/>
+              </a:spcAft>
+              <a:defRPr sz="1150">
+                <a:solidFill>
+                  <a:srgbClr val="0F172A"/>
+                </a:solidFill>
+                <a:latin typeface="Arial"/>
+              </a:defRPr>
+            </a:pPr>
+            <a:r>
+              <a:t>•  Transaction Manager: Coordinates atomic multi-document writes.</a:t>
             </a:r>
           </a:p>
         </p:txBody>
@@ -8661,9 +8629,9 @@
           <a:p>
             <a:pPr>
               <a:spcAft>
-                <a:spcPts val="1000"/>
-              </a:spcAft>
-              <a:defRPr sz="1500" b="1">
+                <a:spcPts val="800"/>
+              </a:spcAft>
+              <a:defRPr sz="1450" b="1">
                 <a:solidFill>
                   <a:srgbClr val="1E3A8A"/>
                 </a:solidFill>
@@ -8671,55 +8639,55 @@
               </a:defRPr>
             </a:pPr>
             <a:r>
-              <a:t>Data &amp; External Services</a:t>
-            </a:r>
-          </a:p>
-          <a:p>
-            <a:pPr>
-              <a:spcAft>
-                <a:spcPts val="600"/>
-              </a:spcAft>
-              <a:defRPr sz="1200">
-                <a:solidFill>
-                  <a:srgbClr val="0F172A"/>
-                </a:solidFill>
-                <a:latin typeface="Arial"/>
-              </a:defRPr>
-            </a:pPr>
-            <a:r>
-              <a:t>•  MongoDB Database: Persists 8 normalized collections (Users, Customers, Products, Sales, etc.).</a:t>
-            </a:r>
-          </a:p>
-          <a:p>
-            <a:pPr>
-              <a:spcAft>
-                <a:spcPts val="600"/>
-              </a:spcAft>
-              <a:defRPr sz="1200">
-                <a:solidFill>
-                  <a:srgbClr val="0F172A"/>
-                </a:solidFill>
-                <a:latin typeface="Arial"/>
-              </a:defRPr>
-            </a:pPr>
-            <a:r>
-              <a:t>•  Cloudinary Media Cloud: Optimizes image delivery for inventory assets and payment proofs.</a:t>
-            </a:r>
-          </a:p>
-          <a:p>
-            <a:pPr>
-              <a:spcAft>
-                <a:spcPts val="600"/>
-              </a:spcAft>
-              <a:defRPr sz="1200">
-                <a:solidFill>
-                  <a:srgbClr val="0F172A"/>
-                </a:solidFill>
-                <a:latin typeface="Arial"/>
-              </a:defRPr>
-            </a:pPr>
-            <a:r>
-              <a:t>•  Razorpay Gateway: Secure webhook and signature verification for online payments.</a:t>
+              <a:t>3. Database &amp; Cloud Tier</a:t>
+            </a:r>
+          </a:p>
+          <a:p>
+            <a:pPr>
+              <a:spcAft>
+                <a:spcPts val="500"/>
+              </a:spcAft>
+              <a:defRPr sz="1150">
+                <a:solidFill>
+                  <a:srgbClr val="0F172A"/>
+                </a:solidFill>
+                <a:latin typeface="Arial"/>
+              </a:defRPr>
+            </a:pPr>
+            <a:r>
+              <a:t>•  MongoDB Database: Persists 7 core collections with relational ObjectId links.</a:t>
+            </a:r>
+          </a:p>
+          <a:p>
+            <a:pPr>
+              <a:spcAft>
+                <a:spcPts val="500"/>
+              </a:spcAft>
+              <a:defRPr sz="1150">
+                <a:solidFill>
+                  <a:srgbClr val="0F172A"/>
+                </a:solidFill>
+                <a:latin typeface="Arial"/>
+              </a:defRPr>
+            </a:pPr>
+            <a:r>
+              <a:t>•  Cloudinary CDN: Optimized cloud storage for product and receipt images.</a:t>
+            </a:r>
+          </a:p>
+          <a:p>
+            <a:pPr>
+              <a:spcAft>
+                <a:spcPts val="500"/>
+              </a:spcAft>
+              <a:defRPr sz="1150">
+                <a:solidFill>
+                  <a:srgbClr val="0F172A"/>
+                </a:solidFill>
+                <a:latin typeface="Arial"/>
+              </a:defRPr>
+            </a:pPr>
+            <a:r>
+              <a:t>•  Razorpay Gateway: Secure payment checkout and webhook verification.</a:t>
             </a:r>
           </a:p>
         </p:txBody>
@@ -8765,7 +8733,7 @@
           <a:lstStyle/>
           <a:p>
             <a:pPr>
-              <a:defRPr sz="1100" b="1">
+              <a:defRPr sz="1050" b="1">
                 <a:solidFill>
                   <a:srgbClr val="0284C7"/>
                 </a:solidFill>
@@ -8773,12 +8741,12 @@
               </a:defRPr>
             </a:pPr>
             <a:r>
-              <a:t>MAJOR PROJECT PRESENTATION</a:t>
-            </a:r>
-          </a:p>
-          <a:p>
-            <a:pPr>
-              <a:defRPr sz="2400" b="1">
+              <a:t>MCA 3RD SEMESTER MINI PROJECT PRESENTATION</a:t>
+            </a:r>
+          </a:p>
+          <a:p>
+            <a:pPr>
+              <a:defRPr sz="2300" b="1">
                 <a:solidFill>
                   <a:srgbClr val="1E3A8A"/>
                 </a:solidFill>
@@ -8905,9 +8873,9 @@
           <a:p>
             <a:pPr>
               <a:spcAft>
-                <a:spcPts val="1000"/>
-              </a:spcAft>
-              <a:defRPr sz="1500" b="1">
+                <a:spcPts val="800"/>
+              </a:spcAft>
+              <a:defRPr sz="1450" b="1">
                 <a:solidFill>
                   <a:srgbClr val="1E3A8A"/>
                 </a:solidFill>
@@ -8915,63 +8883,63 @@
               </a:defRPr>
             </a:pPr>
             <a:r>
-              <a:t>POS Billing Workflow</a:t>
-            </a:r>
-          </a:p>
-          <a:p>
-            <a:pPr>
-              <a:spcAft>
-                <a:spcPts val="600"/>
-              </a:spcAft>
-              <a:defRPr sz="1200">
-                <a:solidFill>
-                  <a:srgbClr val="0F172A"/>
-                </a:solidFill>
-                <a:latin typeface="Arial"/>
-              </a:defRPr>
-            </a:pPr>
-            <a:r>
-              <a:t>•  Live Catalog Search: Fast keyword lookup with live availability indicators.</a:t>
-            </a:r>
-          </a:p>
-          <a:p>
-            <a:pPr>
-              <a:spcAft>
-                <a:spcPts val="600"/>
-              </a:spcAft>
-              <a:defRPr sz="1200">
-                <a:solidFill>
-                  <a:srgbClr val="0F172A"/>
-                </a:solidFill>
-                <a:latin typeface="Arial"/>
-              </a:defRPr>
-            </a:pPr>
-            <a:r>
-              <a:t>•  Mixed Cart Items: Supports both cataloged products and unrecorded custom walk-in items.</a:t>
-            </a:r>
-          </a:p>
-          <a:p>
-            <a:pPr>
-              <a:spcAft>
-                <a:spcPts val="600"/>
-              </a:spcAft>
-              <a:defRPr sz="1200">
-                <a:solidFill>
-                  <a:srgbClr val="0F172A"/>
-                </a:solidFill>
-                <a:latin typeface="Arial"/>
-              </a:defRPr>
-            </a:pPr>
-            <a:r>
-              <a:t>•  Multi-Payment Settlement Modes:</a:t>
-            </a:r>
-          </a:p>
-          <a:p>
-            <a:pPr>
-              <a:spcAft>
-                <a:spcPts val="600"/>
-              </a:spcAft>
-              <a:defRPr sz="1200">
+              <a:t>POS Counter Billing Features</a:t>
+            </a:r>
+          </a:p>
+          <a:p>
+            <a:pPr>
+              <a:spcAft>
+                <a:spcPts val="500"/>
+              </a:spcAft>
+              <a:defRPr sz="1150">
+                <a:solidFill>
+                  <a:srgbClr val="0F172A"/>
+                </a:solidFill>
+                <a:latin typeface="Arial"/>
+              </a:defRPr>
+            </a:pPr>
+            <a:r>
+              <a:t>•  Fast Catalog Search: Instant product selection with live price and stock display.</a:t>
+            </a:r>
+          </a:p>
+          <a:p>
+            <a:pPr>
+              <a:spcAft>
+                <a:spcPts val="500"/>
+              </a:spcAft>
+              <a:defRPr sz="1150">
+                <a:solidFill>
+                  <a:srgbClr val="0F172A"/>
+                </a:solidFill>
+                <a:latin typeface="Arial"/>
+              </a:defRPr>
+            </a:pPr>
+            <a:r>
+              <a:t>•  Mixed Cart Support: Handles catalog products and custom walk-in items simultaneously.</a:t>
+            </a:r>
+          </a:p>
+          <a:p>
+            <a:pPr>
+              <a:spcAft>
+                <a:spcPts val="500"/>
+              </a:spcAft>
+              <a:defRPr sz="1150">
+                <a:solidFill>
+                  <a:srgbClr val="0F172A"/>
+                </a:solidFill>
+                <a:latin typeface="Arial"/>
+              </a:defRPr>
+            </a:pPr>
+            <a:r>
+              <a:t>•  Flexible Settlement Modes:</a:t>
+            </a:r>
+          </a:p>
+          <a:p>
+            <a:pPr>
+              <a:spcAft>
+                <a:spcPts val="500"/>
+              </a:spcAft>
+              <a:defRPr sz="1150">
                 <a:solidFill>
                   <a:srgbClr val="0F172A"/>
                 </a:solidFill>
@@ -8985,9 +8953,9 @@
           <a:p>
             <a:pPr>
               <a:spcAft>
-                <a:spcPts val="600"/>
-              </a:spcAft>
-              <a:defRPr sz="1200">
+                <a:spcPts val="500"/>
+              </a:spcAft>
+              <a:defRPr sz="1150">
                 <a:solidFill>
                   <a:srgbClr val="0F172A"/>
                 </a:solidFill>
@@ -9001,49 +8969,33 @@
           <a:p>
             <a:pPr>
               <a:spcAft>
-                <a:spcPts val="600"/>
-              </a:spcAft>
-              <a:defRPr sz="1200">
-                <a:solidFill>
-                  <a:srgbClr val="0F172A"/>
-                </a:solidFill>
-                <a:latin typeface="Arial"/>
-              </a:defRPr>
-            </a:pPr>
-            <a:r>
-              <a:t>  • 100% Credit (Khata): Automatically binds to customer ledger.</a:t>
-            </a:r>
-          </a:p>
-          <a:p>
-            <a:pPr>
-              <a:spcAft>
-                <a:spcPts val="600"/>
-              </a:spcAft>
-              <a:defRPr sz="1200">
-                <a:solidFill>
-                  <a:srgbClr val="0F172A"/>
-                </a:solidFill>
-                <a:latin typeface="Arial"/>
-              </a:defRPr>
-            </a:pPr>
-            <a:r>
-              <a:t>  • Partial Split: E.g., Pay ₹300 in cash, add ₹700 to credit ledger.</a:t>
-            </a:r>
-          </a:p>
-          <a:p>
-            <a:pPr>
-              <a:spcAft>
-                <a:spcPts val="600"/>
-              </a:spcAft>
-              <a:defRPr sz="1200">
-                <a:solidFill>
-                  <a:srgbClr val="0F172A"/>
-                </a:solidFill>
-                <a:latin typeface="Arial"/>
-              </a:defRPr>
-            </a:pPr>
-            <a:r>
-              <a:t>•  Printable &amp; Downloadable Receipts with itemized tax and totals.</a:t>
+                <a:spcPts val="500"/>
+              </a:spcAft>
+              <a:defRPr sz="1150">
+                <a:solidFill>
+                  <a:srgbClr val="0F172A"/>
+                </a:solidFill>
+                <a:latin typeface="Arial"/>
+              </a:defRPr>
+            </a:pPr>
+            <a:r>
+              <a:t>  • 100% Credit (Khata): Automatically adds to customer's credit ledger.</a:t>
+            </a:r>
+          </a:p>
+          <a:p>
+            <a:pPr>
+              <a:spcAft>
+                <a:spcPts val="500"/>
+              </a:spcAft>
+              <a:defRPr sz="1150">
+                <a:solidFill>
+                  <a:srgbClr val="0F172A"/>
+                </a:solidFill>
+                <a:latin typeface="Arial"/>
+              </a:defRPr>
+            </a:pPr>
+            <a:r>
+              <a:t>  • Partial Split: E.g., Pay ₹300 cash, balance ₹700 added to credit ledger.</a:t>
             </a:r>
           </a:p>
         </p:txBody>
@@ -9117,9 +9069,9 @@
           <a:p>
             <a:pPr>
               <a:spcAft>
-                <a:spcPts val="1000"/>
-              </a:spcAft>
-              <a:defRPr sz="1500" b="1">
+                <a:spcPts val="800"/>
+              </a:spcAft>
+              <a:defRPr sz="1450" b="1">
                 <a:solidFill>
                   <a:srgbClr val="1E3A8A"/>
                 </a:solidFill>
@@ -9127,71 +9079,71 @@
               </a:defRPr>
             </a:pPr>
             <a:r>
-              <a:t>Real-Time Stock &amp; Atomicity</a:t>
-            </a:r>
-          </a:p>
-          <a:p>
-            <a:pPr>
-              <a:spcAft>
-                <a:spcPts val="600"/>
-              </a:spcAft>
-              <a:defRPr sz="1200">
-                <a:solidFill>
-                  <a:srgbClr val="0F172A"/>
-                </a:solidFill>
-                <a:latin typeface="Arial"/>
-              </a:defRPr>
-            </a:pPr>
-            <a:r>
-              <a:t>•  Atomic Stock Deduction: Decrements stock via {$gte: qty} to strictly eliminate overselling.</a:t>
-            </a:r>
-          </a:p>
-          <a:p>
-            <a:pPr>
-              <a:spcAft>
-                <a:spcPts val="600"/>
-              </a:spcAft>
-              <a:defRPr sz="1200">
-                <a:solidFill>
-                  <a:srgbClr val="0F172A"/>
-                </a:solidFill>
-                <a:latin typeface="Arial"/>
-              </a:defRPr>
-            </a:pPr>
-            <a:r>
-              <a:t>•  Auto Availability Toggle: Marks products 'Out of Stock' when inventory reaches 0.</a:t>
-            </a:r>
-          </a:p>
-          <a:p>
-            <a:pPr>
-              <a:spcAft>
-                <a:spcPts val="600"/>
-              </a:spcAft>
-              <a:defRPr sz="1200">
-                <a:solidFill>
-                  <a:srgbClr val="0F172A"/>
-                </a:solidFill>
-                <a:latin typeface="Arial"/>
-              </a:defRPr>
-            </a:pPr>
-            <a:r>
-              <a:t>•  Credit Ceiling Guard: Automatically blocks credit sales if customer's debt exceeds Max Borrow Limit.</a:t>
-            </a:r>
-          </a:p>
-          <a:p>
-            <a:pPr>
-              <a:spcAft>
-                <a:spcPts val="600"/>
-              </a:spcAft>
-              <a:defRPr sz="1200">
-                <a:solidFill>
-                  <a:srgbClr val="0F172A"/>
-                </a:solidFill>
-                <a:latin typeface="Arial"/>
-              </a:defRPr>
-            </a:pPr>
-            <a:r>
-              <a:t>•  Single Transaction Scope: Stock deduction, sale creation, and credit ledger update succeed or fail together.</a:t>
+              <a:t>Stock &amp; Credit Safeguards</a:t>
+            </a:r>
+          </a:p>
+          <a:p>
+            <a:pPr>
+              <a:spcAft>
+                <a:spcPts val="500"/>
+              </a:spcAft>
+              <a:defRPr sz="1150">
+                <a:solidFill>
+                  <a:srgbClr val="0F172A"/>
+                </a:solidFill>
+                <a:latin typeface="Arial"/>
+              </a:defRPr>
+            </a:pPr>
+            <a:r>
+              <a:t>•  Atomic Stock Deduction: Decrements product stock using {$gte: qty} to prevent negative stock.</a:t>
+            </a:r>
+          </a:p>
+          <a:p>
+            <a:pPr>
+              <a:spcAft>
+                <a:spcPts val="500"/>
+              </a:spcAft>
+              <a:defRPr sz="1150">
+                <a:solidFill>
+                  <a:srgbClr val="0F172A"/>
+                </a:solidFill>
+                <a:latin typeface="Arial"/>
+              </a:defRPr>
+            </a:pPr>
+            <a:r>
+              <a:t>•  Auto Availability Toggle: Automatically marks items 'Out of Stock' when stock reaches 0.</a:t>
+            </a:r>
+          </a:p>
+          <a:p>
+            <a:pPr>
+              <a:spcAft>
+                <a:spcPts val="500"/>
+              </a:spcAft>
+              <a:defRPr sz="1150">
+                <a:solidFill>
+                  <a:srgbClr val="0F172A"/>
+                </a:solidFill>
+                <a:latin typeface="Arial"/>
+              </a:defRPr>
+            </a:pPr>
+            <a:r>
+              <a:t>•  Borrow Limit Enforcement: Validates customer debt ceiling before approving credit sales.</a:t>
+            </a:r>
+          </a:p>
+          <a:p>
+            <a:pPr>
+              <a:spcAft>
+                <a:spcPts val="500"/>
+              </a:spcAft>
+              <a:defRPr sz="1150">
+                <a:solidFill>
+                  <a:srgbClr val="0F172A"/>
+                </a:solidFill>
+                <a:latin typeface="Arial"/>
+              </a:defRPr>
+            </a:pPr>
+            <a:r>
+              <a:t>•  ACID Transaction: Stock deduction, sale record, and credit creation succeed together or rollback.</a:t>
             </a:r>
           </a:p>
         </p:txBody>
@@ -9237,7 +9189,7 @@
           <a:lstStyle/>
           <a:p>
             <a:pPr>
-              <a:defRPr sz="1100" b="1">
+              <a:defRPr sz="1050" b="1">
                 <a:solidFill>
                   <a:srgbClr val="0284C7"/>
                 </a:solidFill>
@@ -9245,12 +9197,12 @@
               </a:defRPr>
             </a:pPr>
             <a:r>
-              <a:t>MAJOR PROJECT PRESENTATION</a:t>
-            </a:r>
-          </a:p>
-          <a:p>
-            <a:pPr>
-              <a:defRPr sz="2400" b="1">
+              <a:t>MCA 3RD SEMESTER MINI PROJECT PRESENTATION</a:t>
+            </a:r>
+          </a:p>
+          <a:p>
+            <a:pPr>
+              <a:defRPr sz="2300" b="1">
                 <a:solidFill>
                   <a:srgbClr val="1E3A8A"/>
                 </a:solidFill>
@@ -9377,9 +9329,9 @@
           <a:p>
             <a:pPr>
               <a:spcAft>
-                <a:spcPts val="1000"/>
-              </a:spcAft>
-              <a:defRPr sz="1500" b="1">
+                <a:spcPts val="800"/>
+              </a:spcAft>
+              <a:defRPr sz="1450" b="1">
                 <a:solidFill>
                   <a:srgbClr val="1E3A8A"/>
                 </a:solidFill>
@@ -9393,65 +9345,65 @@
           <a:p>
             <a:pPr>
               <a:spcAft>
-                <a:spcPts val="600"/>
-              </a:spcAft>
-              <a:defRPr sz="1200">
-                <a:solidFill>
-                  <a:srgbClr val="0F172A"/>
-                </a:solidFill>
-                <a:latin typeface="Arial"/>
-              </a:defRPr>
-            </a:pPr>
-            <a:r>
-              <a:t>•  Individual Customer Ledger: Tracks total borrowed, amount paid, and net pending balance.</a:t>
-            </a:r>
-          </a:p>
-          <a:p>
-            <a:pPr>
-              <a:spcAft>
-                <a:spcPts val="600"/>
-              </a:spcAft>
-              <a:defRPr sz="1200">
-                <a:solidFill>
-                  <a:srgbClr val="0F172A"/>
-                </a:solidFill>
-                <a:latin typeface="Arial"/>
-              </a:defRPr>
-            </a:pPr>
-            <a:r>
-              <a:t>•  Due Date Timeline: Configurable repayment deadlines with extension tracking.</a:t>
-            </a:r>
-          </a:p>
-          <a:p>
-            <a:pPr>
-              <a:spcAft>
-                <a:spcPts val="600"/>
-              </a:spcAft>
-              <a:defRPr sz="1200">
-                <a:solidFill>
-                  <a:srgbClr val="0F172A"/>
-                </a:solidFill>
-                <a:latin typeface="Arial"/>
-              </a:defRPr>
-            </a:pPr>
-            <a:r>
-              <a:t>•  Automatic Ledger Statuses: 'Active', 'Partially Paid', 'Paid', and 'Overdue'.</a:t>
-            </a:r>
-          </a:p>
-          <a:p>
-            <a:pPr>
-              <a:spcAft>
-                <a:spcPts val="600"/>
-              </a:spcAft>
-              <a:defRPr sz="1200">
-                <a:solidFill>
-                  <a:srgbClr val="0F172A"/>
-                </a:solidFill>
-                <a:latin typeface="Arial"/>
-              </a:defRPr>
-            </a:pPr>
-            <a:r>
-              <a:t>•  Historical Purchase Audit: Full breakdown of which specific sale contributed to the debt.</a:t>
+                <a:spcPts val="500"/>
+              </a:spcAft>
+              <a:defRPr sz="1150">
+                <a:solidFill>
+                  <a:srgbClr val="0F172A"/>
+                </a:solidFill>
+                <a:latin typeface="Arial"/>
+              </a:defRPr>
+            </a:pPr>
+            <a:r>
+              <a:t>•  Customer Credit Ledger: Tracks total borrowed, paid amount, and net pending balance.</a:t>
+            </a:r>
+          </a:p>
+          <a:p>
+            <a:pPr>
+              <a:spcAft>
+                <a:spcPts val="500"/>
+              </a:spcAft>
+              <a:defRPr sz="1150">
+                <a:solidFill>
+                  <a:srgbClr val="0F172A"/>
+                </a:solidFill>
+                <a:latin typeface="Arial"/>
+              </a:defRPr>
+            </a:pPr>
+            <a:r>
+              <a:t>•  Due Date Timeline: Configurable repayment deadlines for each credit entry.</a:t>
+            </a:r>
+          </a:p>
+          <a:p>
+            <a:pPr>
+              <a:spcAft>
+                <a:spcPts val="500"/>
+              </a:spcAft>
+              <a:defRPr sz="1150">
+                <a:solidFill>
+                  <a:srgbClr val="0F172A"/>
+                </a:solidFill>
+                <a:latin typeface="Arial"/>
+              </a:defRPr>
+            </a:pPr>
+            <a:r>
+              <a:t>•  Credit Statuses: 'Active', 'Partially Paid', 'Paid', and 'Overdue'.</a:t>
+            </a:r>
+          </a:p>
+          <a:p>
+            <a:pPr>
+              <a:spcAft>
+                <a:spcPts val="500"/>
+              </a:spcAft>
+              <a:defRPr sz="1150">
+                <a:solidFill>
+                  <a:srgbClr val="0F172A"/>
+                </a:solidFill>
+                <a:latin typeface="Arial"/>
+              </a:defRPr>
+            </a:pPr>
+            <a:r>
+              <a:t>•  Historical Invoice Link: Every credit record links directly to its original sale invoice.</a:t>
             </a:r>
           </a:p>
         </p:txBody>
@@ -9525,9 +9477,9 @@
           <a:p>
             <a:pPr>
               <a:spcAft>
-                <a:spcPts val="1000"/>
-              </a:spcAft>
-              <a:defRPr sz="1500" b="1">
+                <a:spcPts val="800"/>
+              </a:spcAft>
+              <a:defRPr sz="1450" b="1">
                 <a:solidFill>
                   <a:srgbClr val="1E3A8A"/>
                 </a:solidFill>
@@ -9541,65 +9493,65 @@
           <a:p>
             <a:pPr>
               <a:spcAft>
-                <a:spcPts val="600"/>
-              </a:spcAft>
-              <a:defRPr sz="1200">
-                <a:solidFill>
-                  <a:srgbClr val="0F172A"/>
-                </a:solidFill>
-                <a:latin typeface="Arial"/>
-              </a:defRPr>
-            </a:pPr>
-            <a:r>
-              <a:t>•  Dynamic Trust Score: Computed based on repayment punctuality and transaction history.</a:t>
-            </a:r>
-          </a:p>
-          <a:p>
-            <a:pPr>
-              <a:spcAft>
-                <a:spcPts val="600"/>
-              </a:spcAft>
-              <a:defRPr sz="1200">
-                <a:solidFill>
-                  <a:srgbClr val="0F172A"/>
-                </a:solidFill>
-                <a:latin typeface="Arial"/>
-              </a:defRPr>
-            </a:pPr>
-            <a:r>
-              <a:t>•  Manual Borrow Limit Cap: Shop owner can set customized debt ceilings for risky customers.</a:t>
-            </a:r>
-          </a:p>
-          <a:p>
-            <a:pPr>
-              <a:spcAft>
-                <a:spcPts val="600"/>
-              </a:spcAft>
-              <a:defRPr sz="1200">
-                <a:solidFill>
-                  <a:srgbClr val="0F172A"/>
-                </a:solidFill>
-                <a:latin typeface="Arial"/>
-              </a:defRPr>
-            </a:pPr>
-            <a:r>
-              <a:t>•  Debt Reduction Algorithm: Payments reduce oldest active credit records in FIFO sequence.</a:t>
-            </a:r>
-          </a:p>
-          <a:p>
-            <a:pPr>
-              <a:spcAft>
-                <a:spcPts val="600"/>
-              </a:spcAft>
-              <a:defRPr sz="1200">
-                <a:solidFill>
-                  <a:srgbClr val="0F172A"/>
-                </a:solidFill>
-                <a:latin typeface="Arial"/>
-              </a:defRPr>
-            </a:pPr>
-            <a:r>
-              <a:t>•  Customer Ledger Visibility: Customers see exact real-time balance on their own devices.</a:t>
+                <a:spcPts val="500"/>
+              </a:spcAft>
+              <a:defRPr sz="1150">
+                <a:solidFill>
+                  <a:srgbClr val="0F172A"/>
+                </a:solidFill>
+                <a:latin typeface="Arial"/>
+              </a:defRPr>
+            </a:pPr>
+            <a:r>
+              <a:t>•  Customer Trust Rating: Computed based on repayment punctuality and history.</a:t>
+            </a:r>
+          </a:p>
+          <a:p>
+            <a:pPr>
+              <a:spcAft>
+                <a:spcPts val="500"/>
+              </a:spcAft>
+              <a:defRPr sz="1150">
+                <a:solidFill>
+                  <a:srgbClr val="0F172A"/>
+                </a:solidFill>
+                <a:latin typeface="Arial"/>
+              </a:defRPr>
+            </a:pPr>
+            <a:r>
+              <a:t>•  Custom Borrow Limits: Shopkeeper can set maximum credit limit for individual customers.</a:t>
+            </a:r>
+          </a:p>
+          <a:p>
+            <a:pPr>
+              <a:spcAft>
+                <a:spcPts val="500"/>
+              </a:spcAft>
+              <a:defRPr sz="1150">
+                <a:solidFill>
+                  <a:srgbClr val="0F172A"/>
+                </a:solidFill>
+                <a:latin typeface="Arial"/>
+              </a:defRPr>
+            </a:pPr>
+            <a:r>
+              <a:t>•  FIFO Debt Reduction: Payments automatically settle the oldest active credit first.</a:t>
+            </a:r>
+          </a:p>
+          <a:p>
+            <a:pPr>
+              <a:spcAft>
+                <a:spcPts val="500"/>
+              </a:spcAft>
+              <a:defRPr sz="1150">
+                <a:solidFill>
+                  <a:srgbClr val="0F172A"/>
+                </a:solidFill>
+                <a:latin typeface="Arial"/>
+              </a:defRPr>
+            </a:pPr>
+            <a:r>
+              <a:t>•  Customer Transparency: Customers see exact real-time balance on their own mobile devices.</a:t>
             </a:r>
           </a:p>
         </p:txBody>
@@ -9645,7 +9597,7 @@
           <a:lstStyle/>
           <a:p>
             <a:pPr>
-              <a:defRPr sz="1100" b="1">
+              <a:defRPr sz="1050" b="1">
                 <a:solidFill>
                   <a:srgbClr val="0284C7"/>
                 </a:solidFill>
@@ -9653,12 +9605,12 @@
               </a:defRPr>
             </a:pPr>
             <a:r>
-              <a:t>MAJOR PROJECT PRESENTATION</a:t>
-            </a:r>
-          </a:p>
-          <a:p>
-            <a:pPr>
-              <a:defRPr sz="2400" b="1">
+              <a:t>MCA 3RD SEMESTER MINI PROJECT PRESENTATION</a:t>
+            </a:r>
+          </a:p>
+          <a:p>
+            <a:pPr>
+              <a:defRPr sz="2300" b="1">
                 <a:solidFill>
                   <a:srgbClr val="1E3A8A"/>
                 </a:solidFill>
@@ -9785,9 +9737,9 @@
           <a:p>
             <a:pPr>
               <a:spcAft>
-                <a:spcPts val="1000"/>
-              </a:spcAft>
-              <a:defRPr sz="1500" b="1">
+                <a:spcPts val="800"/>
+              </a:spcAft>
+              <a:defRPr sz="1450" b="1">
                 <a:solidFill>
                   <a:srgbClr val="1E3A8A"/>
                 </a:solidFill>
@@ -9801,41 +9753,41 @@
           <a:p>
             <a:pPr>
               <a:spcAft>
-                <a:spcPts val="600"/>
-              </a:spcAft>
-              <a:defRPr sz="1200">
-                <a:solidFill>
-                  <a:srgbClr val="0F172A"/>
-                </a:solidFill>
-                <a:latin typeface="Arial"/>
-              </a:defRPr>
-            </a:pPr>
-            <a:r>
-              <a:t>•  Full Sale Return: Returns all items from an invoice, restocks all quantities, and clears associated credit.</a:t>
-            </a:r>
-          </a:p>
-          <a:p>
-            <a:pPr>
-              <a:spcAft>
-                <a:spcPts val="600"/>
-              </a:spcAft>
-              <a:defRPr sz="1200">
-                <a:solidFill>
-                  <a:srgbClr val="0F172A"/>
-                </a:solidFill>
-                <a:latin typeface="Arial"/>
-              </a:defRPr>
-            </a:pPr>
-            <a:r>
-              <a:t>•  Partial Item Return: Clerk selects specific returned item and quantity (e.g. 2 out of 5 kg returned).</a:t>
-            </a:r>
-          </a:p>
-          <a:p>
-            <a:pPr>
-              <a:spcAft>
-                <a:spcPts val="600"/>
-              </a:spcAft>
-              <a:defRPr sz="1200">
+                <a:spcPts val="500"/>
+              </a:spcAft>
+              <a:defRPr sz="1150">
+                <a:solidFill>
+                  <a:srgbClr val="0F172A"/>
+                </a:solidFill>
+                <a:latin typeface="Arial"/>
+              </a:defRPr>
+            </a:pPr>
+            <a:r>
+              <a:t>•  Full Sale Return: Returns all items from an invoice, restores inventory, and clears credit.</a:t>
+            </a:r>
+          </a:p>
+          <a:p>
+            <a:pPr>
+              <a:spcAft>
+                <a:spcPts val="500"/>
+              </a:spcAft>
+              <a:defRPr sz="1150">
+                <a:solidFill>
+                  <a:srgbClr val="0F172A"/>
+                </a:solidFill>
+                <a:latin typeface="Arial"/>
+              </a:defRPr>
+            </a:pPr>
+            <a:r>
+              <a:t>•  Partial Item Return: Shopkeeper selects specific returned item and quantity.</a:t>
+            </a:r>
+          </a:p>
+          <a:p>
+            <a:pPr>
+              <a:spcAft>
+                <a:spcPts val="500"/>
+              </a:spcAft>
+              <a:defRPr sz="1150">
                 <a:solidFill>
                   <a:srgbClr val="0F172A"/>
                 </a:solidFill>
@@ -9849,17 +9801,17 @@
           <a:p>
             <a:pPr>
               <a:spcAft>
-                <a:spcPts val="600"/>
-              </a:spcAft>
-              <a:defRPr sz="1200">
-                <a:solidFill>
-                  <a:srgbClr val="0F172A"/>
-                </a:solidFill>
-                <a:latin typeface="Arial"/>
-              </a:defRPr>
-            </a:pPr>
-            <a:r>
-              <a:t>•  Admin Attribution: Records which store clerk authorized the return.</a:t>
+                <a:spcPts val="500"/>
+              </a:spcAft>
+              <a:defRPr sz="1150">
+                <a:solidFill>
+                  <a:srgbClr val="0F172A"/>
+                </a:solidFill>
+                <a:latin typeface="Arial"/>
+              </a:defRPr>
+            </a:pPr>
+            <a:r>
+              <a:t>•  Admin Accountability: Records which admin authorized the return.</a:t>
             </a:r>
           </a:p>
         </p:txBody>
@@ -9933,9 +9885,9 @@
           <a:p>
             <a:pPr>
               <a:spcAft>
-                <a:spcPts val="1000"/>
-              </a:spcAft>
-              <a:defRPr sz="1500" b="1">
+                <a:spcPts val="800"/>
+              </a:spcAft>
+              <a:defRPr sz="1450" b="1">
                 <a:solidFill>
                   <a:srgbClr val="1E3A8A"/>
                 </a:solidFill>
@@ -9943,15 +9895,15 @@
               </a:defRPr>
             </a:pPr>
             <a:r>
-              <a:t>Automated Financial Balance Correction</a:t>
-            </a:r>
-          </a:p>
-          <a:p>
-            <a:pPr>
-              <a:spcAft>
-                <a:spcPts val="600"/>
-              </a:spcAft>
-              <a:defRPr sz="1200">
+              <a:t>Automated Balance Correction</a:t>
+            </a:r>
+          </a:p>
+          <a:p>
+            <a:pPr>
+              <a:spcAft>
+                <a:spcPts val="500"/>
+              </a:spcAft>
+              <a:defRPr sz="1150">
                 <a:solidFill>
                   <a:srgbClr val="0F172A"/>
                 </a:solidFill>
@@ -9965,49 +9917,49 @@
           <a:p>
             <a:pPr>
               <a:spcAft>
-                <a:spcPts val="600"/>
-              </a:spcAft>
-              <a:defRPr sz="1200">
-                <a:solidFill>
-                  <a:srgbClr val="0F172A"/>
-                </a:solidFill>
-                <a:latin typeface="Arial"/>
-              </a:defRPr>
-            </a:pPr>
-            <a:r>
-              <a:t>•  Ledger Debt Offset: If sale was on Credit, the return amount automatically subtracts from customer's debt.</a:t>
-            </a:r>
-          </a:p>
-          <a:p>
-            <a:pPr>
-              <a:spcAft>
-                <a:spcPts val="600"/>
-              </a:spcAft>
-              <a:defRPr sz="1200">
-                <a:solidFill>
-                  <a:srgbClr val="0F172A"/>
-                </a:solidFill>
-                <a:latin typeface="Arial"/>
-              </a:defRPr>
-            </a:pPr>
-            <a:r>
-              <a:t>•  Cash Refund Option: For fully paid sales, calculates direct refund payout to the customer.</a:t>
-            </a:r>
-          </a:p>
-          <a:p>
-            <a:pPr>
-              <a:spcAft>
-                <a:spcPts val="600"/>
-              </a:spcAft>
-              <a:defRPr sz="1200">
-                <a:solidFill>
-                  <a:srgbClr val="0F172A"/>
-                </a:solidFill>
-                <a:latin typeface="Arial"/>
-              </a:defRPr>
-            </a:pPr>
-            <a:r>
-              <a:t>•  Atomic Execution: Inventory restock and debt reduction occur in an ACID transaction.</a:t>
+                <a:spcPts val="500"/>
+              </a:spcAft>
+              <a:defRPr sz="1150">
+                <a:solidFill>
+                  <a:srgbClr val="0F172A"/>
+                </a:solidFill>
+                <a:latin typeface="Arial"/>
+              </a:defRPr>
+            </a:pPr>
+            <a:r>
+              <a:t>•  Ledger Debt Offset: If sale was on Credit, return amount automatically subtracts from customer's debt.</a:t>
+            </a:r>
+          </a:p>
+          <a:p>
+            <a:pPr>
+              <a:spcAft>
+                <a:spcPts val="500"/>
+              </a:spcAft>
+              <a:defRPr sz="1150">
+                <a:solidFill>
+                  <a:srgbClr val="0F172A"/>
+                </a:solidFill>
+                <a:latin typeface="Arial"/>
+              </a:defRPr>
+            </a:pPr>
+            <a:r>
+              <a:t>•  Cash Refund Calculation: For fully paid sales, calculates direct refund payout to the customer.</a:t>
+            </a:r>
+          </a:p>
+          <a:p>
+            <a:pPr>
+              <a:spcAft>
+                <a:spcPts val="500"/>
+              </a:spcAft>
+              <a:defRPr sz="1150">
+                <a:solidFill>
+                  <a:srgbClr val="0F172A"/>
+                </a:solidFill>
+                <a:latin typeface="Arial"/>
+              </a:defRPr>
+            </a:pPr>
+            <a:r>
+              <a:t>•  Transactional Integrity: Inventory restock and debt offset execute in an atomic transaction.</a:t>
             </a:r>
           </a:p>
         </p:txBody>
